--- a/Data/CSC483_Week3_A.pptx
+++ b/Data/CSC483_Week3_A.pptx
@@ -1,6 +1,6 @@
 
 <file path=ppt/presentation.xml><?xml version="1.0" encoding="utf-8"?>
-<p:presentation xmlns:a="http://schemas.openxmlformats.org/drawingml/2006/main" xmlns:p="http://schemas.openxmlformats.org/presentationml/2006/main" xmlns:r="http://schemas.openxmlformats.org/officeDocument/2006/relationships" autoCompressPictures="0" saveSubsetFonts="1">
+<p:presentation xmlns:a="http://schemas.openxmlformats.org/drawingml/2006/main" xmlns:r="http://schemas.openxmlformats.org/officeDocument/2006/relationships" xmlns:p="http://schemas.openxmlformats.org/presentationml/2006/main" saveSubsetFonts="1" autoCompressPictures="0">
   <p:sldMasterIdLst>
     <p:sldMasterId id="2147483648" r:id="rId1"/>
   </p:sldMasterIdLst>
@@ -43,8 +43,8 @@
     <a:defPPr>
       <a:defRPr lang="en-US"/>
     </a:defPPr>
-    <a:lvl1pPr algn="l" defTabSz="457200" eaLnBrk="1" hangingPunct="1" latinLnBrk="0" marL="0" rtl="0">
-      <a:defRPr kern="1200" sz="1800">
+    <a:lvl1pPr marL="0" algn="l" defTabSz="457200" rtl="0" eaLnBrk="1" latinLnBrk="0" hangingPunct="1">
+      <a:defRPr sz="1800" kern="1200">
         <a:solidFill>
           <a:schemeClr val="tx1"/>
         </a:solidFill>
@@ -53,8 +53,8 @@
         <a:cs typeface="+mn-cs"/>
       </a:defRPr>
     </a:lvl1pPr>
-    <a:lvl2pPr algn="l" defTabSz="457200" eaLnBrk="1" hangingPunct="1" latinLnBrk="0" marL="457200" rtl="0">
-      <a:defRPr kern="1200" sz="1800">
+    <a:lvl2pPr marL="457200" algn="l" defTabSz="457200" rtl="0" eaLnBrk="1" latinLnBrk="0" hangingPunct="1">
+      <a:defRPr sz="1800" kern="1200">
         <a:solidFill>
           <a:schemeClr val="tx1"/>
         </a:solidFill>
@@ -63,8 +63,8 @@
         <a:cs typeface="+mn-cs"/>
       </a:defRPr>
     </a:lvl2pPr>
-    <a:lvl3pPr algn="l" defTabSz="457200" eaLnBrk="1" hangingPunct="1" latinLnBrk="0" marL="914400" rtl="0">
-      <a:defRPr kern="1200" sz="1800">
+    <a:lvl3pPr marL="914400" algn="l" defTabSz="457200" rtl="0" eaLnBrk="1" latinLnBrk="0" hangingPunct="1">
+      <a:defRPr sz="1800" kern="1200">
         <a:solidFill>
           <a:schemeClr val="tx1"/>
         </a:solidFill>
@@ -73,8 +73,8 @@
         <a:cs typeface="+mn-cs"/>
       </a:defRPr>
     </a:lvl3pPr>
-    <a:lvl4pPr algn="l" defTabSz="457200" eaLnBrk="1" hangingPunct="1" latinLnBrk="0" marL="1371600" rtl="0">
-      <a:defRPr kern="1200" sz="1800">
+    <a:lvl4pPr marL="1371600" algn="l" defTabSz="457200" rtl="0" eaLnBrk="1" latinLnBrk="0" hangingPunct="1">
+      <a:defRPr sz="1800" kern="1200">
         <a:solidFill>
           <a:schemeClr val="tx1"/>
         </a:solidFill>
@@ -83,8 +83,8 @@
         <a:cs typeface="+mn-cs"/>
       </a:defRPr>
     </a:lvl4pPr>
-    <a:lvl5pPr algn="l" defTabSz="457200" eaLnBrk="1" hangingPunct="1" latinLnBrk="0" marL="1828800" rtl="0">
-      <a:defRPr kern="1200" sz="1800">
+    <a:lvl5pPr marL="1828800" algn="l" defTabSz="457200" rtl="0" eaLnBrk="1" latinLnBrk="0" hangingPunct="1">
+      <a:defRPr sz="1800" kern="1200">
         <a:solidFill>
           <a:schemeClr val="tx1"/>
         </a:solidFill>
@@ -93,8 +93,8 @@
         <a:cs typeface="+mn-cs"/>
       </a:defRPr>
     </a:lvl5pPr>
-    <a:lvl6pPr algn="l" defTabSz="457200" eaLnBrk="1" hangingPunct="1" latinLnBrk="0" marL="2286000" rtl="0">
-      <a:defRPr kern="1200" sz="1800">
+    <a:lvl6pPr marL="2286000" algn="l" defTabSz="457200" rtl="0" eaLnBrk="1" latinLnBrk="0" hangingPunct="1">
+      <a:defRPr sz="1800" kern="1200">
         <a:solidFill>
           <a:schemeClr val="tx1"/>
         </a:solidFill>
@@ -103,8 +103,8 @@
         <a:cs typeface="+mn-cs"/>
       </a:defRPr>
     </a:lvl6pPr>
-    <a:lvl7pPr algn="l" defTabSz="457200" eaLnBrk="1" hangingPunct="1" latinLnBrk="0" marL="2743200" rtl="0">
-      <a:defRPr kern="1200" sz="1800">
+    <a:lvl7pPr marL="2743200" algn="l" defTabSz="457200" rtl="0" eaLnBrk="1" latinLnBrk="0" hangingPunct="1">
+      <a:defRPr sz="1800" kern="1200">
         <a:solidFill>
           <a:schemeClr val="tx1"/>
         </a:solidFill>
@@ -113,8 +113,8 @@
         <a:cs typeface="+mn-cs"/>
       </a:defRPr>
     </a:lvl7pPr>
-    <a:lvl8pPr algn="l" defTabSz="457200" eaLnBrk="1" hangingPunct="1" latinLnBrk="0" marL="3200400" rtl="0">
-      <a:defRPr kern="1200" sz="1800">
+    <a:lvl8pPr marL="3200400" algn="l" defTabSz="457200" rtl="0" eaLnBrk="1" latinLnBrk="0" hangingPunct="1">
+      <a:defRPr sz="1800" kern="1200">
         <a:solidFill>
           <a:schemeClr val="tx1"/>
         </a:solidFill>
@@ -123,8 +123,8 @@
         <a:cs typeface="+mn-cs"/>
       </a:defRPr>
     </a:lvl8pPr>
-    <a:lvl9pPr algn="l" defTabSz="457200" eaLnBrk="1" hangingPunct="1" latinLnBrk="0" marL="3657600" rtl="0">
-      <a:defRPr kern="1200" sz="1800">
+    <a:lvl9pPr marL="3657600" algn="l" defTabSz="457200" rtl="0" eaLnBrk="1" latinLnBrk="0" hangingPunct="1">
+      <a:defRPr sz="1800" kern="1200">
         <a:solidFill>
           <a:schemeClr val="tx1"/>
         </a:solidFill>
@@ -755,7 +755,7 @@
           <a:p>
             <a:fld id="{241EB5C9-1307-BA42-ABA2-0BC069CD8E7F}" type="datetimeFigureOut">
               <a:rPr lang="en-US" smtClean="0"/>
-              <a:t>4/19/26</a:t>
+              <a:t>5/4/26</a:t>
             </a:fld>
             <a:endParaRPr lang="en-US"/>
           </a:p>
@@ -2262,7 +2262,7 @@
 </file>
 
 <file path=ppt/slideMasters/slideMaster1.xml><?xml version="1.0" encoding="utf-8"?>
-<p:sldMaster xmlns:a="http://schemas.openxmlformats.org/drawingml/2006/main" xmlns:p="http://schemas.openxmlformats.org/presentationml/2006/main" xmlns:r="http://schemas.openxmlformats.org/officeDocument/2006/relationships">
+<p:sldMaster xmlns:a="http://schemas.openxmlformats.org/drawingml/2006/main" xmlns:r="http://schemas.openxmlformats.org/officeDocument/2006/relationships" xmlns:p="http://schemas.openxmlformats.org/presentationml/2006/main">
   <p:cSld>
     <p:bg>
       <p:bgRef idx="1001">
@@ -2290,7 +2290,7 @@
             <a:spLocks noGrp="1"/>
           </p:cNvSpPr>
           <p:nvPr>
-            <p:ph idx="4" sz="quarter" type="sldNum"/>
+            <p:ph type="sldNum" sz="quarter" idx="4"/>
           </p:nvPr>
         </p:nvSpPr>
         <p:spPr>
@@ -2303,7 +2303,7 @@
           </a:prstGeom>
         </p:spPr>
         <p:txBody>
-          <a:bodyPr anchor="ctr" bIns="45720" lIns="91440" rIns="91440" rtlCol="0" tIns="45720" vert="horz"/>
+          <a:bodyPr vert="horz" lIns="91440" tIns="45720" rIns="91440" bIns="45720" rtlCol="0" anchor="ctr"/>
           <a:lstStyle>
             <a:lvl1pPr algn="r">
               <a:defRPr sz="900">
@@ -2312,7 +2312,7 @@
                     <a:tint val="75000"/>
                   </a:schemeClr>
                 </a:solidFill>
-                <a:latin charset="0" panose="02000503020000020003" pitchFamily="2" typeface="Avenir Book"/>
+                <a:latin typeface="Avenir Book" panose="02000503020000020003" pitchFamily="2" charset="0"/>
               </a:defRPr>
             </a:lvl1pPr>
           </a:lstStyle>
@@ -2322,7 +2322,7 @@
               <a:pPr/>
               <a:t>‹#›</a:t>
             </a:fld>
-            <a:endParaRPr dirty="0" lang="en-US"/>
+            <a:endParaRPr lang="en-US" dirty="0"/>
           </a:p>
         </p:txBody>
       </p:sp>
@@ -2352,7 +2352,7 @@
           </a:prstGeom>
         </p:spPr>
         <p:txBody>
-          <a:bodyPr anchor="ctr" bIns="45720" lIns="91440" rIns="91440" rtlCol="0" tIns="45720" vert="horz">
+          <a:bodyPr vert="horz" lIns="91440" tIns="45720" rIns="91440" bIns="45720" rtlCol="0" anchor="ctr">
             <a:normAutofit/>
           </a:bodyPr>
           <a:lstStyle/>
@@ -2361,7 +2361,7 @@
               <a:rPr lang="en-US"/>
               <a:t>Click to edit Master title style</a:t>
             </a:r>
-            <a:endParaRPr dirty="0" lang="en-US"/>
+            <a:endParaRPr lang="en-US" dirty="0"/>
           </a:p>
         </p:txBody>
       </p:sp>
@@ -2372,7 +2372,7 @@
             <a:spLocks noGrp="1"/>
           </p:cNvSpPr>
           <p:nvPr>
-            <p:ph idx="1" type="body"/>
+            <p:ph type="body" idx="1"/>
           </p:nvPr>
         </p:nvSpPr>
         <p:spPr>
@@ -2385,7 +2385,7 @@
           </a:prstGeom>
         </p:spPr>
         <p:txBody>
-          <a:bodyPr bIns="45720" lIns="91440" rIns="91440" rtlCol="0" tIns="45720" vert="horz">
+          <a:bodyPr vert="horz" lIns="91440" tIns="45720" rIns="91440" bIns="45720" rtlCol="0">
             <a:normAutofit/>
           </a:bodyPr>
           <a:lstStyle/>
@@ -2423,7 +2423,7 @@
               <a:rPr lang="en-US"/>
               <a:t>Fifth level</a:t>
             </a:r>
-            <a:endParaRPr dirty="0" lang="en-US"/>
+            <a:endParaRPr lang="en-US" dirty="0"/>
           </a:p>
         </p:txBody>
       </p:sp>
@@ -2434,7 +2434,7 @@
       </p:ext>
     </p:extLst>
   </p:cSld>
-  <p:clrMap accent1="accent1" accent2="accent2" accent3="accent3" accent4="accent4" accent5="accent5" accent6="accent6" bg1="lt1" bg2="lt2" folHlink="folHlink" hlink="hlink" tx1="dk1" tx2="dk2"/>
+  <p:clrMap bg1="lt1" tx1="dk1" bg2="lt2" tx2="dk2" accent1="accent1" accent2="accent2" accent3="accent3" accent4="accent4" accent5="accent5" accent6="accent6" hlink="hlink" folHlink="folHlink"/>
   <p:sldLayoutIdLst>
     <p:sldLayoutId id="2147483649" r:id="rId1"/>
     <p:sldLayoutId id="2147483650" r:id="rId2"/>
@@ -2450,104 +2450,104 @@
   </p:sldLayoutIdLst>
   <p:txStyles>
     <p:titleStyle>
-      <a:lvl1pPr algn="ctr" defTabSz="342900" eaLnBrk="1" hangingPunct="1" latinLnBrk="0" rtl="0">
+      <a:lvl1pPr algn="ctr" defTabSz="342900" rtl="0" eaLnBrk="1" latinLnBrk="0" hangingPunct="1">
         <a:spcBef>
           <a:spcPct val="0"/>
         </a:spcBef>
         <a:buNone/>
-        <a:defRPr kern="1200" sz="3300">
+        <a:defRPr sz="3300" kern="1200">
           <a:solidFill>
             <a:schemeClr val="tx1"/>
           </a:solidFill>
-          <a:latin charset="0" panose="02000503020000020003" pitchFamily="2" typeface="Avenir Book"/>
+          <a:latin typeface="Avenir Book" panose="02000503020000020003" pitchFamily="2" charset="0"/>
           <a:ea typeface="+mj-ea"/>
           <a:cs typeface="+mj-cs"/>
         </a:defRPr>
       </a:lvl1pPr>
     </p:titleStyle>
     <p:bodyStyle>
-      <a:lvl1pPr algn="l" defTabSz="342900" eaLnBrk="1" hangingPunct="1" indent="-342900" latinLnBrk="0" marL="342900" rtl="0">
+      <a:lvl1pPr marL="342900" indent="-342900" algn="l" defTabSz="342900" rtl="0" eaLnBrk="1" latinLnBrk="0" hangingPunct="1">
         <a:spcBef>
           <a:spcPct val="20000"/>
         </a:spcBef>
         <a:buFont typeface="Arial"/>
         <a:buChar char="•"/>
-        <a:defRPr kern="1200" sz="2400">
+        <a:defRPr sz="2400" kern="1200">
           <a:solidFill>
             <a:schemeClr val="tx1"/>
           </a:solidFill>
-          <a:latin charset="0" panose="02000503020000020003" pitchFamily="2" typeface="Avenir Book"/>
+          <a:latin typeface="Avenir Book" panose="02000503020000020003" pitchFamily="2" charset="0"/>
           <a:ea typeface="+mn-ea"/>
           <a:cs typeface="+mn-cs"/>
         </a:defRPr>
       </a:lvl1pPr>
-      <a:lvl2pPr algn="l" defTabSz="342900" eaLnBrk="1" hangingPunct="1" indent="-342900" latinLnBrk="0" marL="685800" rtl="0">
+      <a:lvl2pPr marL="685800" indent="-342900" algn="l" defTabSz="342900" rtl="0" eaLnBrk="1" latinLnBrk="0" hangingPunct="1">
         <a:spcBef>
           <a:spcPct val="20000"/>
         </a:spcBef>
         <a:buFont typeface="Arial"/>
         <a:buChar char="–"/>
-        <a:defRPr kern="1200" sz="2100">
+        <a:defRPr sz="2100" kern="1200">
           <a:solidFill>
             <a:schemeClr val="tx1"/>
           </a:solidFill>
-          <a:latin charset="0" panose="02000503020000020003" pitchFamily="2" typeface="Avenir Book"/>
+          <a:latin typeface="Avenir Book" panose="02000503020000020003" pitchFamily="2" charset="0"/>
           <a:ea typeface="+mn-ea"/>
           <a:cs typeface="+mn-cs"/>
         </a:defRPr>
       </a:lvl2pPr>
-      <a:lvl3pPr algn="l" defTabSz="342900" eaLnBrk="1" hangingPunct="1" indent="-342900" latinLnBrk="0" marL="1028700" rtl="0">
+      <a:lvl3pPr marL="1028700" indent="-342900" algn="l" defTabSz="342900" rtl="0" eaLnBrk="1" latinLnBrk="0" hangingPunct="1">
         <a:spcBef>
           <a:spcPct val="20000"/>
         </a:spcBef>
         <a:buFont typeface="Arial"/>
         <a:buChar char="•"/>
-        <a:defRPr kern="1200" sz="1800">
+        <a:defRPr sz="1800" kern="1200">
           <a:solidFill>
             <a:schemeClr val="tx1"/>
           </a:solidFill>
-          <a:latin charset="0" panose="02000503020000020003" pitchFamily="2" typeface="Avenir Book"/>
+          <a:latin typeface="Avenir Book" panose="02000503020000020003" pitchFamily="2" charset="0"/>
           <a:ea typeface="+mn-ea"/>
           <a:cs typeface="+mn-cs"/>
         </a:defRPr>
       </a:lvl3pPr>
-      <a:lvl4pPr algn="l" defTabSz="342900" eaLnBrk="1" hangingPunct="1" indent="-342900" latinLnBrk="0" marL="1371600" rtl="0">
+      <a:lvl4pPr marL="1371600" indent="-342900" algn="l" defTabSz="342900" rtl="0" eaLnBrk="1" latinLnBrk="0" hangingPunct="1">
         <a:spcBef>
           <a:spcPct val="20000"/>
         </a:spcBef>
         <a:buFont typeface="Arial"/>
         <a:buChar char="–"/>
-        <a:defRPr kern="1200" sz="1500">
+        <a:defRPr sz="1500" kern="1200">
           <a:solidFill>
             <a:schemeClr val="tx1"/>
           </a:solidFill>
-          <a:latin charset="0" panose="02000503020000020003" pitchFamily="2" typeface="Avenir Book"/>
+          <a:latin typeface="Avenir Book" panose="02000503020000020003" pitchFamily="2" charset="0"/>
           <a:ea typeface="+mn-ea"/>
           <a:cs typeface="+mn-cs"/>
         </a:defRPr>
       </a:lvl4pPr>
-      <a:lvl5pPr algn="l" defTabSz="342900" eaLnBrk="1" hangingPunct="1" indent="-342900" latinLnBrk="0" marL="1714500" rtl="0">
+      <a:lvl5pPr marL="1714500" indent="-342900" algn="l" defTabSz="342900" rtl="0" eaLnBrk="1" latinLnBrk="0" hangingPunct="1">
         <a:spcBef>
           <a:spcPct val="20000"/>
         </a:spcBef>
         <a:buFont typeface="Arial"/>
         <a:buChar char="»"/>
-        <a:defRPr kern="1200" sz="1500">
+        <a:defRPr sz="1500" kern="1200">
           <a:solidFill>
             <a:schemeClr val="tx1"/>
           </a:solidFill>
-          <a:latin charset="0" panose="02000503020000020003" pitchFamily="2" typeface="Avenir Book"/>
+          <a:latin typeface="Avenir Book" panose="02000503020000020003" pitchFamily="2" charset="0"/>
           <a:ea typeface="+mn-ea"/>
           <a:cs typeface="+mn-cs"/>
         </a:defRPr>
       </a:lvl5pPr>
-      <a:lvl6pPr algn="l" defTabSz="342900" eaLnBrk="1" hangingPunct="1" indent="-342900" latinLnBrk="0" marL="2057400" rtl="0">
+      <a:lvl6pPr marL="2057400" indent="-342900" algn="l" defTabSz="342900" rtl="0" eaLnBrk="1" latinLnBrk="0" hangingPunct="1">
         <a:spcBef>
           <a:spcPct val="20000"/>
         </a:spcBef>
         <a:buFont typeface="Arial"/>
         <a:buChar char="•"/>
-        <a:defRPr kern="1200" sz="1500">
+        <a:defRPr sz="1500" kern="1200">
           <a:solidFill>
             <a:schemeClr val="tx1"/>
           </a:solidFill>
@@ -2556,13 +2556,13 @@
           <a:cs typeface="+mn-cs"/>
         </a:defRPr>
       </a:lvl6pPr>
-      <a:lvl7pPr algn="l" defTabSz="342900" eaLnBrk="1" hangingPunct="1" indent="-342900" latinLnBrk="0" marL="2400300" rtl="0">
+      <a:lvl7pPr marL="2400300" indent="-342900" algn="l" defTabSz="342900" rtl="0" eaLnBrk="1" latinLnBrk="0" hangingPunct="1">
         <a:spcBef>
           <a:spcPct val="20000"/>
         </a:spcBef>
         <a:buFont typeface="Arial"/>
         <a:buChar char="•"/>
-        <a:defRPr kern="1200" sz="1500">
+        <a:defRPr sz="1500" kern="1200">
           <a:solidFill>
             <a:schemeClr val="tx1"/>
           </a:solidFill>
@@ -2571,13 +2571,13 @@
           <a:cs typeface="+mn-cs"/>
         </a:defRPr>
       </a:lvl7pPr>
-      <a:lvl8pPr algn="l" defTabSz="342900" eaLnBrk="1" hangingPunct="1" indent="-342900" latinLnBrk="0" marL="2743200" rtl="0">
+      <a:lvl8pPr marL="2743200" indent="-342900" algn="l" defTabSz="342900" rtl="0" eaLnBrk="1" latinLnBrk="0" hangingPunct="1">
         <a:spcBef>
           <a:spcPct val="20000"/>
         </a:spcBef>
         <a:buFont typeface="Arial"/>
         <a:buChar char="•"/>
-        <a:defRPr kern="1200" sz="1500">
+        <a:defRPr sz="1500" kern="1200">
           <a:solidFill>
             <a:schemeClr val="tx1"/>
           </a:solidFill>
@@ -2586,13 +2586,13 @@
           <a:cs typeface="+mn-cs"/>
         </a:defRPr>
       </a:lvl8pPr>
-      <a:lvl9pPr algn="l" defTabSz="342900" eaLnBrk="1" hangingPunct="1" indent="-342900" latinLnBrk="0" marL="3086100" rtl="0">
+      <a:lvl9pPr marL="3086100" indent="-342900" algn="l" defTabSz="342900" rtl="0" eaLnBrk="1" latinLnBrk="0" hangingPunct="1">
         <a:spcBef>
           <a:spcPct val="20000"/>
         </a:spcBef>
         <a:buFont typeface="Arial"/>
         <a:buChar char="•"/>
-        <a:defRPr kern="1200" sz="1500">
+        <a:defRPr sz="1500" kern="1200">
           <a:solidFill>
             <a:schemeClr val="tx1"/>
           </a:solidFill>
@@ -2606,8 +2606,8 @@
       <a:defPPr>
         <a:defRPr lang="en-US"/>
       </a:defPPr>
-      <a:lvl1pPr algn="l" defTabSz="342900" eaLnBrk="1" hangingPunct="1" latinLnBrk="0" marL="0" rtl="0">
-        <a:defRPr kern="1200" sz="1350">
+      <a:lvl1pPr marL="0" algn="l" defTabSz="342900" rtl="0" eaLnBrk="1" latinLnBrk="0" hangingPunct="1">
+        <a:defRPr sz="1350" kern="1200">
           <a:solidFill>
             <a:schemeClr val="tx1"/>
           </a:solidFill>
@@ -2616,8 +2616,8 @@
           <a:cs typeface="+mn-cs"/>
         </a:defRPr>
       </a:lvl1pPr>
-      <a:lvl2pPr algn="l" defTabSz="342900" eaLnBrk="1" hangingPunct="1" latinLnBrk="0" marL="342900" rtl="0">
-        <a:defRPr kern="1200" sz="1350">
+      <a:lvl2pPr marL="342900" algn="l" defTabSz="342900" rtl="0" eaLnBrk="1" latinLnBrk="0" hangingPunct="1">
+        <a:defRPr sz="1350" kern="1200">
           <a:solidFill>
             <a:schemeClr val="tx1"/>
           </a:solidFill>
@@ -2626,8 +2626,8 @@
           <a:cs typeface="+mn-cs"/>
         </a:defRPr>
       </a:lvl2pPr>
-      <a:lvl3pPr algn="l" defTabSz="342900" eaLnBrk="1" hangingPunct="1" latinLnBrk="0" marL="685800" rtl="0">
-        <a:defRPr kern="1200" sz="1350">
+      <a:lvl3pPr marL="685800" algn="l" defTabSz="342900" rtl="0" eaLnBrk="1" latinLnBrk="0" hangingPunct="1">
+        <a:defRPr sz="1350" kern="1200">
           <a:solidFill>
             <a:schemeClr val="tx1"/>
           </a:solidFill>
@@ -2636,8 +2636,8 @@
           <a:cs typeface="+mn-cs"/>
         </a:defRPr>
       </a:lvl3pPr>
-      <a:lvl4pPr algn="l" defTabSz="342900" eaLnBrk="1" hangingPunct="1" latinLnBrk="0" marL="1028700" rtl="0">
-        <a:defRPr kern="1200" sz="1350">
+      <a:lvl4pPr marL="1028700" algn="l" defTabSz="342900" rtl="0" eaLnBrk="1" latinLnBrk="0" hangingPunct="1">
+        <a:defRPr sz="1350" kern="1200">
           <a:solidFill>
             <a:schemeClr val="tx1"/>
           </a:solidFill>
@@ -2646,8 +2646,8 @@
           <a:cs typeface="+mn-cs"/>
         </a:defRPr>
       </a:lvl4pPr>
-      <a:lvl5pPr algn="l" defTabSz="342900" eaLnBrk="1" hangingPunct="1" latinLnBrk="0" marL="1371600" rtl="0">
-        <a:defRPr kern="1200" sz="1350">
+      <a:lvl5pPr marL="1371600" algn="l" defTabSz="342900" rtl="0" eaLnBrk="1" latinLnBrk="0" hangingPunct="1">
+        <a:defRPr sz="1350" kern="1200">
           <a:solidFill>
             <a:schemeClr val="tx1"/>
           </a:solidFill>
@@ -2656,8 +2656,8 @@
           <a:cs typeface="+mn-cs"/>
         </a:defRPr>
       </a:lvl5pPr>
-      <a:lvl6pPr algn="l" defTabSz="342900" eaLnBrk="1" hangingPunct="1" latinLnBrk="0" marL="1714500" rtl="0">
-        <a:defRPr kern="1200" sz="1350">
+      <a:lvl6pPr marL="1714500" algn="l" defTabSz="342900" rtl="0" eaLnBrk="1" latinLnBrk="0" hangingPunct="1">
+        <a:defRPr sz="1350" kern="1200">
           <a:solidFill>
             <a:schemeClr val="tx1"/>
           </a:solidFill>
@@ -2666,8 +2666,8 @@
           <a:cs typeface="+mn-cs"/>
         </a:defRPr>
       </a:lvl6pPr>
-      <a:lvl7pPr algn="l" defTabSz="342900" eaLnBrk="1" hangingPunct="1" latinLnBrk="0" marL="2057400" rtl="0">
-        <a:defRPr kern="1200" sz="1350">
+      <a:lvl7pPr marL="2057400" algn="l" defTabSz="342900" rtl="0" eaLnBrk="1" latinLnBrk="0" hangingPunct="1">
+        <a:defRPr sz="1350" kern="1200">
           <a:solidFill>
             <a:schemeClr val="tx1"/>
           </a:solidFill>
@@ -2676,8 +2676,8 @@
           <a:cs typeface="+mn-cs"/>
         </a:defRPr>
       </a:lvl7pPr>
-      <a:lvl8pPr algn="l" defTabSz="342900" eaLnBrk="1" hangingPunct="1" latinLnBrk="0" marL="2400300" rtl="0">
-        <a:defRPr kern="1200" sz="1350">
+      <a:lvl8pPr marL="2400300" algn="l" defTabSz="342900" rtl="0" eaLnBrk="1" latinLnBrk="0" hangingPunct="1">
+        <a:defRPr sz="1350" kern="1200">
           <a:solidFill>
             <a:schemeClr val="tx1"/>
           </a:solidFill>
@@ -2686,8 +2686,8 @@
           <a:cs typeface="+mn-cs"/>
         </a:defRPr>
       </a:lvl8pPr>
-      <a:lvl9pPr algn="l" defTabSz="342900" eaLnBrk="1" hangingPunct="1" latinLnBrk="0" marL="2743200" rtl="0">
-        <a:defRPr kern="1200" sz="1350">
+      <a:lvl9pPr marL="2743200" algn="l" defTabSz="342900" rtl="0" eaLnBrk="1" latinLnBrk="0" hangingPunct="1">
+        <a:defRPr sz="1350" kern="1200">
           <a:solidFill>
             <a:schemeClr val="tx1"/>
           </a:solidFill>
@@ -2741,11 +2741,10 @@
           <a:bodyPr/>
           <a:lstStyle/>
           <a:p>
-            <a:pPr lvl="0" indent="0" marL="0">
+            <a:pPr marL="0" lvl="0" indent="0">
               <a:buNone/>
             </a:pPr>
             <a:r>
-              <a:rPr/>
               <a:t>CSC 483 - Applied Biological Data Sciece W3D1</a:t>
             </a:r>
           </a:p>
@@ -2758,7 +2757,7 @@
             <a:spLocks noGrp="1"/>
           </p:cNvSpPr>
           <p:nvPr>
-            <p:ph idx="1" type="subTitle"/>
+            <p:ph type="subTitle" idx="1"/>
           </p:nvPr>
         </p:nvSpPr>
         <p:spPr>
@@ -2771,16 +2770,20 @@
           <a:bodyPr/>
           <a:lstStyle/>
           <a:p>
-            <a:pPr lvl="0" indent="0" marL="0">
+            <a:pPr marL="0" lvl="0" indent="0">
               <a:buNone/>
             </a:pPr>
             <a:br/>
             <a:br/>
+            <a:endParaRPr/>
           </a:p>
         </p:txBody>
       </p:sp>
     </p:spTree>
   </p:cSld>
+  <p:clrMapOvr>
+    <a:masterClrMapping/>
+  </p:clrMapOvr>
 </p:sld>
 </file>
 
@@ -2824,11 +2827,10 @@
           <a:bodyPr/>
           <a:lstStyle/>
           <a:p>
-            <a:pPr lvl="0" indent="0" marL="0">
+            <a:pPr marL="0" lvl="0" indent="0">
               <a:buNone/>
             </a:pPr>
             <a:r>
-              <a:rPr/>
               <a:t>Purpose of Collecting Biological Data</a:t>
             </a:r>
           </a:p>
@@ -2851,42 +2853,36 @@
           <a:p>
             <a:pPr lvl="0"/>
             <a:r>
-              <a:rPr/>
               <a:t>for non-human data (microbes, animals): who is there and what are they doing?</a:t>
             </a:r>
           </a:p>
           <a:p>
             <a:pPr lvl="1"/>
             <a:r>
-              <a:rPr/>
               <a:t>whole genomes</a:t>
             </a:r>
           </a:p>
           <a:p>
             <a:pPr lvl="1"/>
             <a:r>
-              <a:rPr/>
               <a:t>16S, ITS</a:t>
             </a:r>
           </a:p>
           <a:p>
             <a:pPr lvl="1"/>
             <a:r>
-              <a:rPr/>
               <a:t>meta-genomes</a:t>
             </a:r>
           </a:p>
           <a:p>
             <a:pPr lvl="1"/>
             <a:r>
-              <a:rPr/>
               <a:t>RNAseq - what are they doing</a:t>
             </a:r>
           </a:p>
           <a:p>
             <a:pPr lvl="1"/>
             <a:r>
-              <a:rPr/>
               <a:t>meta-transcriptomics</a:t>
             </a:r>
           </a:p>
@@ -2894,6 +2890,9 @@
       </p:sp>
     </p:spTree>
   </p:cSld>
+  <p:clrMapOvr>
+    <a:masterClrMapping/>
+  </p:clrMapOvr>
   <p:timing>
     <p:tnLst>
       <p:par>
@@ -3261,14 +3260,15 @@
           </a:prstGeom>
         </p:spPr>
         <p:txBody>
-          <a:bodyPr/>
+          <a:bodyPr>
+            <a:normAutofit fontScale="90000"/>
+          </a:bodyPr>
           <a:lstStyle/>
           <a:p>
-            <a:pPr lvl="0" indent="0" marL="0">
+            <a:pPr marL="0" lvl="0" indent="0">
               <a:buNone/>
             </a:pPr>
             <a:r>
-              <a:rPr/>
               <a:t>Slides on gene expression and the environment</a:t>
             </a:r>
           </a:p>
@@ -3291,28 +3291,24 @@
           <a:p>
             <a:pPr lvl="0"/>
             <a:r>
-              <a:rPr/>
               <a:t>always need comparisons</a:t>
             </a:r>
           </a:p>
           <a:p>
             <a:pPr lvl="0"/>
             <a:r>
-              <a:rPr/>
               <a:t>treat cultures with drugs, etc.</a:t>
             </a:r>
           </a:p>
           <a:p>
             <a:pPr lvl="0"/>
             <a:r>
-              <a:rPr/>
               <a:t>DNA: identifies subjects of interest</a:t>
             </a:r>
           </a:p>
           <a:p>
             <a:pPr lvl="0"/>
             <a:r>
-              <a:rPr/>
               <a:t>RNA: describes activities</a:t>
             </a:r>
           </a:p>
@@ -3320,6 +3316,9 @@
       </p:sp>
     </p:spTree>
   </p:cSld>
+  <p:clrMapOvr>
+    <a:masterClrMapping/>
+  </p:clrMapOvr>
   <p:timing>
     <p:tnLst>
       <p:par>
@@ -3592,11 +3591,10 @@
           <a:bodyPr/>
           <a:lstStyle/>
           <a:p>
-            <a:pPr lvl="0" indent="0" marL="0">
+            <a:pPr marL="0" lvl="0" indent="0">
               <a:buNone/>
             </a:pPr>
             <a:r>
-              <a:rPr/>
               <a:t>Experimental Workflow</a:t>
             </a:r>
           </a:p>
@@ -3609,7 +3607,7 @@
             <a:spLocks noGrp="1"/>
           </p:cNvSpPr>
           <p:nvPr>
-            <p:ph idx="2" sz="half" type="body"/>
+            <p:ph type="body" sz="half" idx="2"/>
           </p:nvPr>
         </p:nvSpPr>
         <p:spPr/>
@@ -3617,15 +3615,16 @@
           <a:bodyPr/>
           <a:lstStyle/>
           <a:p>
-            <a:pPr lvl="0" indent="0" marL="0">
+            <a:pPr marL="0" lvl="0" indent="0">
               <a:buNone/>
             </a:pPr>
+            <a:endParaRPr/>
           </a:p>
         </p:txBody>
       </p:sp>
       <p:pic>
         <p:nvPicPr>
-          <p:cNvPr descr="CSC483_Week3_A_files/figure-pptx/mermaid-figure-4.png" id="0" name="Picture 1"/>
+          <p:cNvPr id="3" name="Picture 1" descr="CSC483_Week3_A_files/figure-pptx/mermaid-figure-4.png"/>
           <p:cNvPicPr>
             <a:picLocks noGrp="1" noChangeAspect="1"/>
           </p:cNvPicPr>
@@ -3655,6 +3654,9 @@
       </p:pic>
     </p:spTree>
   </p:cSld>
+  <p:clrMapOvr>
+    <a:masterClrMapping/>
+  </p:clrMapOvr>
 </p:sld>
 </file>
 
@@ -3690,32 +3692,28 @@
           <a:bodyPr/>
           <a:lstStyle/>
           <a:p>
-            <a:pPr lvl="0" indent="0" marL="0">
+            <a:pPr marL="0" lvl="0" indent="0">
               <a:buNone/>
             </a:pPr>
             <a:r>
-              <a:rPr/>
               <a:t> </a:t>
             </a:r>
           </a:p>
           <a:p>
             <a:pPr lvl="0"/>
             <a:r>
-              <a:rPr/>
               <a:t>as data scientists, we start right after sequencing</a:t>
             </a:r>
           </a:p>
           <a:p>
             <a:pPr lvl="0"/>
             <a:r>
-              <a:rPr/>
               <a:t>we still need to know what was done during samples collection and sequencing</a:t>
             </a:r>
           </a:p>
           <a:p>
             <a:pPr lvl="1"/>
             <a:r>
-              <a:rPr/>
               <a:t>“metadata”</a:t>
             </a:r>
           </a:p>
@@ -3723,6 +3721,9 @@
       </p:sp>
     </p:spTree>
   </p:cSld>
+  <p:clrMapOvr>
+    <a:masterClrMapping/>
+  </p:clrMapOvr>
   <p:timing>
     <p:tnLst>
       <p:par>
@@ -3946,11 +3947,10 @@
           <a:bodyPr/>
           <a:lstStyle/>
           <a:p>
-            <a:pPr lvl="0" indent="0" marL="0">
+            <a:pPr marL="0" lvl="0" indent="0">
               <a:buNone/>
             </a:pPr>
             <a:r>
-              <a:rPr/>
               <a:t>Course Goals</a:t>
             </a:r>
           </a:p>
@@ -3973,21 +3973,18 @@
           <a:p>
             <a:pPr lvl="0"/>
             <a:r>
-              <a:rPr/>
               <a:t>Biological Data Science workflow from seq to data to hypothesis testing</a:t>
             </a:r>
           </a:p>
           <a:p>
             <a:pPr lvl="0"/>
             <a:r>
-              <a:rPr/>
               <a:t>Interdisciplinary scientific communication</a:t>
             </a:r>
           </a:p>
           <a:p>
             <a:pPr lvl="0"/>
             <a:r>
-              <a:rPr/>
               <a:t>research projects</a:t>
             </a:r>
           </a:p>
@@ -3995,6 +3992,9 @@
       </p:sp>
     </p:spTree>
   </p:cSld>
+  <p:clrMapOvr>
+    <a:masterClrMapping/>
+  </p:clrMapOvr>
   <p:timing>
     <p:tnLst>
       <p:par>
@@ -4218,11 +4218,10 @@
           <a:bodyPr/>
           <a:lstStyle/>
           <a:p>
-            <a:pPr lvl="0" indent="0" marL="0">
+            <a:pPr marL="0" lvl="0" indent="0">
               <a:buNone/>
             </a:pPr>
             <a:r>
-              <a:rPr/>
               <a:t>DNA sequencing, a molecular approach</a:t>
             </a:r>
           </a:p>
@@ -4230,7 +4229,7 @@
       </p:sp>
       <p:pic>
         <p:nvPicPr>
-          <p:cNvPr descr="next_gen_seq.jpg" id="0" name="Picture 1"/>
+          <p:cNvPr id="3" name="Picture 1" descr="next_gen_seq.jpg"/>
           <p:cNvPicPr>
             <a:picLocks noGrp="1" noChangeAspect="1"/>
           </p:cNvPicPr>
@@ -4260,6 +4259,9 @@
       </p:pic>
     </p:spTree>
   </p:cSld>
+  <p:clrMapOvr>
+    <a:masterClrMapping/>
+  </p:clrMapOvr>
 </p:sld>
 </file>
 
@@ -4297,14 +4299,12 @@
           <a:p>
             <a:pPr lvl="0"/>
             <a:r>
-              <a:rPr/>
               <a:t>dNTPs, gels (?)</a:t>
             </a:r>
           </a:p>
           <a:p>
             <a:pPr lvl="0"/>
             <a:r>
-              <a:rPr/>
               <a:t>next generation machines, seqeuncing by synthesis, flouraphores</a:t>
             </a:r>
           </a:p>
@@ -4312,6 +4312,9 @@
       </p:sp>
     </p:spTree>
   </p:cSld>
+  <p:clrMapOvr>
+    <a:masterClrMapping/>
+  </p:clrMapOvr>
   <p:timing>
     <p:tnLst>
       <p:par>
@@ -4486,11 +4489,10 @@
           <a:bodyPr/>
           <a:lstStyle/>
           <a:p>
-            <a:pPr lvl="0" indent="0" marL="0">
+            <a:pPr marL="0" lvl="0" indent="0">
               <a:buNone/>
             </a:pPr>
             <a:r>
-              <a:rPr/>
               <a:t>Seqeunce interpretation</a:t>
             </a:r>
           </a:p>
@@ -4513,28 +4515,24 @@
           <a:p>
             <a:pPr lvl="0"/>
             <a:r>
-              <a:rPr/>
               <a:t>fasta, nt sequence</a:t>
             </a:r>
           </a:p>
           <a:p>
             <a:pPr lvl="0"/>
             <a:r>
-              <a:rPr/>
               <a:t>RBS</a:t>
             </a:r>
           </a:p>
           <a:p>
             <a:pPr lvl="0"/>
             <a:r>
-              <a:rPr/>
               <a:t>codons, ORF, start/stop</a:t>
             </a:r>
           </a:p>
           <a:p>
             <a:pPr lvl="0"/>
             <a:r>
-              <a:rPr/>
               <a:t>we can know genes are there without knowing what they do…</a:t>
             </a:r>
           </a:p>
@@ -4542,6 +4540,9 @@
       </p:sp>
     </p:spTree>
   </p:cSld>
+  <p:clrMapOvr>
+    <a:masterClrMapping/>
+  </p:clrMapOvr>
   <p:timing>
     <p:tnLst>
       <p:par>
@@ -4814,11 +4815,10 @@
           <a:bodyPr/>
           <a:lstStyle/>
           <a:p>
-            <a:pPr lvl="0" indent="0" marL="0">
+            <a:pPr marL="0" lvl="0" indent="0">
               <a:buNone/>
             </a:pPr>
             <a:r>
-              <a:rPr/>
               <a:t>Sequence interpretation by alignment</a:t>
             </a:r>
           </a:p>
@@ -4841,35 +4841,30 @@
           <a:p>
             <a:pPr lvl="0"/>
             <a:r>
-              <a:rPr/>
               <a:t>reference sequences, databases</a:t>
             </a:r>
           </a:p>
           <a:p>
             <a:pPr lvl="0"/>
             <a:r>
-              <a:rPr/>
               <a:t>BLASTP</a:t>
             </a:r>
           </a:p>
           <a:p>
             <a:pPr lvl="0"/>
             <a:r>
-              <a:rPr/>
               <a:t>BWA align</a:t>
             </a:r>
           </a:p>
           <a:p>
             <a:pPr lvl="0"/>
             <a:r>
-              <a:rPr/>
               <a:t>homology</a:t>
             </a:r>
           </a:p>
           <a:p>
             <a:pPr lvl="0"/>
             <a:r>
-              <a:rPr/>
               <a:t>function prediction, alphafold</a:t>
             </a:r>
           </a:p>
@@ -4877,6 +4872,9 @@
       </p:sp>
     </p:spTree>
   </p:cSld>
+  <p:clrMapOvr>
+    <a:masterClrMapping/>
+  </p:clrMapOvr>
   <p:timing>
     <p:tnLst>
       <p:par>
@@ -5198,11 +5196,10 @@
           <a:bodyPr/>
           <a:lstStyle/>
           <a:p>
-            <a:pPr lvl="0" indent="0" marL="0">
+            <a:pPr marL="0" lvl="0" indent="0">
               <a:buNone/>
             </a:pPr>
             <a:r>
-              <a:rPr/>
               <a:t>Needleman-Wunsch Alg</a:t>
             </a:r>
           </a:p>
@@ -5222,19 +5219,21 @@
             </p:nvSpPr>
             <p:spPr/>
             <p:txBody>
-              <a:bodyPr/>
+              <a:bodyPr>
+                <a:normAutofit lnSpcReduction="10000"/>
+              </a:bodyPr>
               <a:lstStyle/>
               <a:p>
-                <a:pPr lvl="0" indent="0" marL="0">
+                <a:pPr marL="0" lvl="0" indent="0">
                   <a:buNone/>
                 </a:pPr>
                 <a:r>
-                  <a:rPr/>
+                  <a:rPr lang="en-US" dirty="0"/>
                   <a:t>(Global Linear Kernel)</a:t>
                 </a:r>
               </a:p>
               <a:p>
-                <a:pPr lvl="0" indent="0" marL="0">
+                <a:pPr marL="0" lvl="0" indent="0">
                   <a:buNone/>
                 </a:pPr>
                 <a14:m>
@@ -5242,160 +5241,202 @@
                     <m:oMathParaPr>
                       <m:jc m:val="center"/>
                     </m:oMathParaPr>
-                    <m:oMath>
+                    <m:oMath xmlns:m="http://schemas.openxmlformats.org/officeDocument/2006/math">
                       <m:r>
-                        <m:t>S</m:t>
+                        <a:rPr lang="en-US">
+                          <a:latin typeface="Cambria Math" panose="02040503050406030204" pitchFamily="18" charset="0"/>
+                        </a:rPr>
+                        <m:t>𝑆</m:t>
                       </m:r>
                       <m:d>
                         <m:dPr>
-                          <m:begChr m:val="("/>
-                          <m:sepChr m:val=""/>
-                          <m:endChr m:val=")"/>
-                          <m:grow/>
+                          <m:ctrlPr>
+                            <a:rPr lang="ar-AE" i="1">
+                              <a:latin typeface="Cambria Math" panose="02040503050406030204" pitchFamily="18" charset="0"/>
+                            </a:rPr>
+                          </m:ctrlPr>
                         </m:dPr>
                         <m:e>
                           <m:r>
-                            <m:t>i</m:t>
+                            <a:rPr lang="ar-AE">
+                              <a:latin typeface="Cambria Math" panose="02040503050406030204" pitchFamily="18" charset="0"/>
+                            </a:rPr>
+                            <m:t>𝑖</m:t>
                           </m:r>
                           <m:r>
-                            <m:rPr>
-                              <m:sty m:val="p"/>
-                            </m:rPr>
+                            <a:rPr lang="ar-AE">
+                              <a:latin typeface="Cambria Math" panose="02040503050406030204" pitchFamily="18" charset="0"/>
+                            </a:rPr>
                             <m:t>,</m:t>
                           </m:r>
                           <m:r>
-                            <m:t>j</m:t>
+                            <a:rPr lang="ar-AE">
+                              <a:latin typeface="Cambria Math" panose="02040503050406030204" pitchFamily="18" charset="0"/>
+                            </a:rPr>
+                            <m:t>𝑗</m:t>
                           </m:r>
                         </m:e>
                       </m:d>
                       <m:r>
-                        <m:rPr>
-                          <m:sty m:val="p"/>
-                        </m:rPr>
+                        <a:rPr lang="ar-AE">
+                          <a:latin typeface="Cambria Math" panose="02040503050406030204" pitchFamily="18" charset="0"/>
+                        </a:rPr>
                         <m:t>=</m:t>
                       </m:r>
                       <m:r>
                         <m:rPr>
                           <m:sty m:val="p"/>
                         </m:rPr>
+                        <a:rPr lang="en-US">
+                          <a:latin typeface="Cambria Math" panose="02040503050406030204" pitchFamily="18" charset="0"/>
+                        </a:rPr>
                         <m:t>max</m:t>
                       </m:r>
                       <m:d>
                         <m:dPr>
                           <m:begChr m:val="{"/>
-                          <m:sepChr m:val=""/>
                           <m:endChr m:val=""/>
-                          <m:grow/>
+                          <m:ctrlPr>
+                            <a:rPr lang="ar-AE" i="1">
+                              <a:latin typeface="Cambria Math" panose="02040503050406030204" pitchFamily="18" charset="0"/>
+                            </a:rPr>
+                          </m:ctrlPr>
                         </m:dPr>
                         <m:e>
                           <m:m>
                             <m:mPr>
-                              <m:baseJc m:val="center"/>
                               <m:plcHide m:val="on"/>
                               <m:mcs>
                                 <m:mc>
                                   <m:mcPr>
-                                    <m:mcJc m:val="left"/>
-                                    <m:count m:val="1"/>
-                                  </m:mcPr>
-                                </m:mc>
-                                <m:mc>
-                                  <m:mcPr>
-                                    <m:mcJc m:val="left"/>
-                                    <m:count m:val="1"/>
+                                    <m:count m:val="2"/>
+                                    <m:mcJc m:val="center"/>
                                   </m:mcPr>
                                 </m:mc>
                               </m:mcs>
+                              <m:ctrlPr>
+                                <a:rPr lang="ar-AE" i="1">
+                                  <a:latin typeface="Cambria Math" panose="02040503050406030204" pitchFamily="18" charset="0"/>
+                                </a:rPr>
+                              </m:ctrlPr>
                             </m:mPr>
                             <m:mr>
                               <m:e>
                                 <m:r>
-                                  <m:t>S</m:t>
+                                  <a:rPr lang="ar-AE">
+                                    <a:latin typeface="Cambria Math" panose="02040503050406030204" pitchFamily="18" charset="0"/>
+                                  </a:rPr>
+                                  <m:t>𝑆</m:t>
                                 </m:r>
                                 <m:d>
                                   <m:dPr>
-                                    <m:begChr m:val="("/>
-                                    <m:sepChr m:val=""/>
-                                    <m:endChr m:val=")"/>
-                                    <m:grow/>
+                                    <m:ctrlPr>
+                                      <a:rPr lang="ar-AE" i="1">
+                                        <a:latin typeface="Cambria Math" panose="02040503050406030204" pitchFamily="18" charset="0"/>
+                                      </a:rPr>
+                                    </m:ctrlPr>
                                   </m:dPr>
                                   <m:e>
                                     <m:r>
-                                      <m:t>i</m:t>
+                                      <a:rPr lang="ar-AE">
+                                        <a:latin typeface="Cambria Math" panose="02040503050406030204" pitchFamily="18" charset="0"/>
+                                      </a:rPr>
+                                      <m:t>𝑖</m:t>
                                     </m:r>
                                     <m:r>
-                                      <m:rPr>
-                                        <m:sty m:val="p"/>
-                                      </m:rPr>
-                                      <m:t>−</m:t>
+                                      <a:rPr lang="ar-AE">
+                                        <a:latin typeface="Cambria Math" panose="02040503050406030204" pitchFamily="18" charset="0"/>
+                                      </a:rPr>
+                                      <m:t>−1,</m:t>
                                     </m:r>
                                     <m:r>
-                                      <m:t>1</m:t>
+                                      <a:rPr lang="ar-AE">
+                                        <a:latin typeface="Cambria Math" panose="02040503050406030204" pitchFamily="18" charset="0"/>
+                                      </a:rPr>
+                                      <m:t>𝑗</m:t>
                                     </m:r>
                                     <m:r>
-                                      <m:rPr>
-                                        <m:sty m:val="p"/>
-                                      </m:rPr>
-                                      <m:t>,</m:t>
-                                    </m:r>
-                                    <m:r>
-                                      <m:t>j</m:t>
-                                    </m:r>
-                                    <m:r>
-                                      <m:rPr>
-                                        <m:sty m:val="p"/>
-                                      </m:rPr>
-                                      <m:t>−</m:t>
-                                    </m:r>
-                                    <m:r>
-                                      <m:t>1</m:t>
+                                      <a:rPr lang="ar-AE">
+                                        <a:latin typeface="Cambria Math" panose="02040503050406030204" pitchFamily="18" charset="0"/>
+                                      </a:rPr>
+                                      <m:t>−1</m:t>
                                     </m:r>
                                   </m:e>
                                 </m:d>
                                 <m:r>
-                                  <m:rPr>
-                                    <m:sty m:val="p"/>
-                                  </m:rPr>
+                                  <a:rPr lang="ar-AE">
+                                    <a:latin typeface="Cambria Math" panose="02040503050406030204" pitchFamily="18" charset="0"/>
+                                  </a:rPr>
                                   <m:t>+</m:t>
                                 </m:r>
                                 <m:r>
-                                  <m:t>s</m:t>
+                                  <a:rPr lang="ar-AE">
+                                    <a:latin typeface="Cambria Math" panose="02040503050406030204" pitchFamily="18" charset="0"/>
+                                  </a:rPr>
+                                  <m:t>𝑠</m:t>
                                 </m:r>
                                 <m:d>
                                   <m:dPr>
-                                    <m:begChr m:val="("/>
-                                    <m:sepChr m:val=""/>
-                                    <m:endChr m:val=")"/>
-                                    <m:grow/>
+                                    <m:ctrlPr>
+                                      <a:rPr lang="ar-AE" i="1">
+                                        <a:latin typeface="Cambria Math" panose="02040503050406030204" pitchFamily="18" charset="0"/>
+                                      </a:rPr>
+                                    </m:ctrlPr>
                                   </m:dPr>
                                   <m:e>
                                     <m:sSub>
+                                      <m:sSubPr>
+                                        <m:ctrlPr>
+                                          <a:rPr lang="ar-AE" i="1">
+                                            <a:latin typeface="Cambria Math" panose="02040503050406030204" pitchFamily="18" charset="0"/>
+                                          </a:rPr>
+                                        </m:ctrlPr>
+                                      </m:sSubPr>
                                       <m:e>
                                         <m:r>
-                                          <m:t>x</m:t>
+                                          <a:rPr lang="ar-AE">
+                                            <a:latin typeface="Cambria Math" panose="02040503050406030204" pitchFamily="18" charset="0"/>
+                                          </a:rPr>
+                                          <m:t>𝑥</m:t>
                                         </m:r>
                                       </m:e>
                                       <m:sub>
                                         <m:r>
-                                          <m:t>i</m:t>
+                                          <a:rPr lang="ar-AE">
+                                            <a:latin typeface="Cambria Math" panose="02040503050406030204" pitchFamily="18" charset="0"/>
+                                          </a:rPr>
+                                          <m:t>𝑖</m:t>
                                         </m:r>
                                       </m:sub>
                                     </m:sSub>
                                     <m:r>
-                                      <m:rPr>
-                                        <m:sty m:val="p"/>
-                                      </m:rPr>
+                                      <a:rPr lang="ar-AE">
+                                        <a:latin typeface="Cambria Math" panose="02040503050406030204" pitchFamily="18" charset="0"/>
+                                      </a:rPr>
                                       <m:t>,</m:t>
                                     </m:r>
                                     <m:sSub>
+                                      <m:sSubPr>
+                                        <m:ctrlPr>
+                                          <a:rPr lang="ar-AE" i="1">
+                                            <a:latin typeface="Cambria Math" panose="02040503050406030204" pitchFamily="18" charset="0"/>
+                                          </a:rPr>
+                                        </m:ctrlPr>
+                                      </m:sSubPr>
                                       <m:e>
                                         <m:r>
-                                          <m:t>y</m:t>
+                                          <a:rPr lang="ar-AE">
+                                            <a:latin typeface="Cambria Math" panose="02040503050406030204" pitchFamily="18" charset="0"/>
+                                          </a:rPr>
+                                          <m:t>𝑦</m:t>
                                         </m:r>
                                       </m:e>
                                       <m:sub>
                                         <m:r>
-                                          <m:t>j</m:t>
+                                          <a:rPr lang="ar-AE">
+                                            <a:latin typeface="Cambria Math" panose="02040503050406030204" pitchFamily="18" charset="0"/>
+                                          </a:rPr>
+                                          <m:t>𝑗</m:t>
                                         </m:r>
                                       </m:sub>
                                     </m:sSub>
@@ -5406,74 +5447,50 @@
                                 <m:r>
                                   <m:rPr>
                                     <m:nor/>
-                                    <m:sty m:val="p"/>
                                   </m:rPr>
-                                  <m:t>(Match or Mismatch)</m:t>
-                                </m:r>
-                              </m:e>
-                            </m:mr>
-                            <m:mr>
-                              <m:e>
-                                <m:r>
-                                  <m:t>S</m:t>
-                                </m:r>
-                                <m:d>
-                                  <m:dPr>
-                                    <m:begChr m:val="("/>
-                                    <m:sepChr m:val=""/>
-                                    <m:endChr m:val=")"/>
-                                    <m:grow/>
-                                  </m:dPr>
-                                  <m:e>
-                                    <m:r>
-                                      <m:t>i</m:t>
-                                    </m:r>
-                                    <m:r>
-                                      <m:rPr>
-                                        <m:sty m:val="p"/>
-                                      </m:rPr>
-                                      <m:t>−</m:t>
-                                    </m:r>
-                                    <m:r>
-                                      <m:t>1</m:t>
-                                    </m:r>
-                                    <m:r>
-                                      <m:rPr>
-                                        <m:sty m:val="p"/>
-                                      </m:rPr>
-                                      <m:t>,</m:t>
-                                    </m:r>
-                                    <m:r>
-                                      <m:t>j</m:t>
-                                    </m:r>
-                                  </m:e>
-                                </m:d>
-                                <m:r>
-                                  <m:rPr>
-                                    <m:sty m:val="p"/>
-                                  </m:rPr>
-                                  <m:t>+</m:t>
-                                </m:r>
-                                <m:r>
-                                  <m:t>g</m:t>
-                                </m:r>
-                              </m:e>
-                              <m:e>
-                                <m:r>
-                                  <m:rPr>
-                                    <m:nor/>
-                                    <m:sty m:val="p"/>
-                                  </m:rPr>
-                                  <m:t>(Gap in </m:t>
-                                </m:r>
-                                <m:r>
-                                  <m:t>Y</m:t>
+                                  <a:rPr lang="ar-AE"/>
+                                  <m:t>(</m:t>
                                 </m:r>
                                 <m:r>
                                   <m:rPr>
                                     <m:nor/>
-                                    <m:sty m:val="p"/>
                                   </m:rPr>
+                                  <a:rPr lang="en-US"/>
+                                  <m:t>Match</m:t>
+                                </m:r>
+                                <m:r>
+                                  <m:rPr>
+                                    <m:nor/>
+                                  </m:rPr>
+                                  <a:rPr lang="en-US"/>
+                                  <m:t> </m:t>
+                                </m:r>
+                                <m:r>
+                                  <m:rPr>
+                                    <m:nor/>
+                                  </m:rPr>
+                                  <a:rPr lang="en-US"/>
+                                  <m:t>or</m:t>
+                                </m:r>
+                                <m:r>
+                                  <m:rPr>
+                                    <m:nor/>
+                                  </m:rPr>
+                                  <a:rPr lang="en-US"/>
+                                  <m:t> </m:t>
+                                </m:r>
+                                <m:r>
+                                  <m:rPr>
+                                    <m:nor/>
+                                  </m:rPr>
+                                  <a:rPr lang="en-US"/>
+                                  <m:t>Mismatch</m:t>
+                                </m:r>
+                                <m:r>
+                                  <m:rPr>
+                                    <m:nor/>
+                                  </m:rPr>
+                                  <a:rPr lang="en-US"/>
                                   <m:t>)</m:t>
                                 </m:r>
                               </m:e>
@@ -5481,65 +5498,207 @@
                             <m:mr>
                               <m:e>
                                 <m:r>
-                                  <m:t>S</m:t>
+                                  <a:rPr lang="ar-AE">
+                                    <a:latin typeface="Cambria Math" panose="02040503050406030204" pitchFamily="18" charset="0"/>
+                                  </a:rPr>
+                                  <m:t>𝑆</m:t>
                                 </m:r>
                                 <m:d>
                                   <m:dPr>
-                                    <m:begChr m:val="("/>
-                                    <m:sepChr m:val=""/>
-                                    <m:endChr m:val=")"/>
-                                    <m:grow/>
+                                    <m:ctrlPr>
+                                      <a:rPr lang="ar-AE" i="1">
+                                        <a:latin typeface="Cambria Math" panose="02040503050406030204" pitchFamily="18" charset="0"/>
+                                      </a:rPr>
+                                    </m:ctrlPr>
                                   </m:dPr>
                                   <m:e>
                                     <m:r>
-                                      <m:t>i</m:t>
+                                      <a:rPr lang="ar-AE">
+                                        <a:latin typeface="Cambria Math" panose="02040503050406030204" pitchFamily="18" charset="0"/>
+                                      </a:rPr>
+                                      <m:t>𝑖</m:t>
                                     </m:r>
                                     <m:r>
-                                      <m:rPr>
-                                        <m:sty m:val="p"/>
-                                      </m:rPr>
-                                      <m:t>,</m:t>
+                                      <a:rPr lang="ar-AE">
+                                        <a:latin typeface="Cambria Math" panose="02040503050406030204" pitchFamily="18" charset="0"/>
+                                      </a:rPr>
+                                      <m:t>−1,</m:t>
                                     </m:r>
                                     <m:r>
-                                      <m:t>j</m:t>
-                                    </m:r>
-                                    <m:r>
-                                      <m:rPr>
-                                        <m:sty m:val="p"/>
-                                      </m:rPr>
-                                      <m:t>−</m:t>
-                                    </m:r>
-                                    <m:r>
-                                      <m:t>1</m:t>
+                                      <a:rPr lang="ar-AE">
+                                        <a:latin typeface="Cambria Math" panose="02040503050406030204" pitchFamily="18" charset="0"/>
+                                      </a:rPr>
+                                      <m:t>𝑗</m:t>
                                     </m:r>
                                   </m:e>
                                 </m:d>
                                 <m:r>
-                                  <m:rPr>
-                                    <m:sty m:val="p"/>
-                                  </m:rPr>
+                                  <a:rPr lang="ar-AE">
+                                    <a:latin typeface="Cambria Math" panose="02040503050406030204" pitchFamily="18" charset="0"/>
+                                  </a:rPr>
                                   <m:t>+</m:t>
                                 </m:r>
                                 <m:r>
-                                  <m:t>g</m:t>
+                                  <a:rPr lang="ar-AE">
+                                    <a:latin typeface="Cambria Math" panose="02040503050406030204" pitchFamily="18" charset="0"/>
+                                  </a:rPr>
+                                  <m:t>𝑔</m:t>
                                 </m:r>
                               </m:e>
                               <m:e>
                                 <m:r>
                                   <m:rPr>
                                     <m:nor/>
-                                    <m:sty m:val="p"/>
                                   </m:rPr>
-                                  <m:t>(Gap in </m:t>
-                                </m:r>
-                                <m:r>
-                                  <m:t>X</m:t>
+                                  <a:rPr lang="ar-AE"/>
+                                  <m:t>(</m:t>
                                 </m:r>
                                 <m:r>
                                   <m:rPr>
                                     <m:nor/>
-                                    <m:sty m:val="p"/>
                                   </m:rPr>
+                                  <a:rPr lang="en-US"/>
+                                  <m:t>Gap</m:t>
+                                </m:r>
+                                <m:r>
+                                  <m:rPr>
+                                    <m:nor/>
+                                  </m:rPr>
+                                  <a:rPr lang="en-US"/>
+                                  <m:t> </m:t>
+                                </m:r>
+                                <m:r>
+                                  <m:rPr>
+                                    <m:nor/>
+                                  </m:rPr>
+                                  <a:rPr lang="en-US"/>
+                                  <m:t>in</m:t>
+                                </m:r>
+                                <m:r>
+                                  <m:rPr>
+                                    <m:nor/>
+                                  </m:rPr>
+                                  <a:rPr lang="en-US"/>
+                                  <m:t> </m:t>
+                                </m:r>
+                                <m:r>
+                                  <a:rPr lang="en-US">
+                                    <a:latin typeface="Cambria Math" panose="02040503050406030204" pitchFamily="18" charset="0"/>
+                                  </a:rPr>
+                                  <m:t>𝑌</m:t>
+                                </m:r>
+                                <m:r>
+                                  <m:rPr>
+                                    <m:nor/>
+                                  </m:rPr>
+                                  <a:rPr lang="en-US"/>
+                                  <m:t>)</m:t>
+                                </m:r>
+                              </m:e>
+                            </m:mr>
+                            <m:mr>
+                              <m:e>
+                                <m:r>
+                                  <a:rPr lang="ar-AE">
+                                    <a:latin typeface="Cambria Math" panose="02040503050406030204" pitchFamily="18" charset="0"/>
+                                  </a:rPr>
+                                  <m:t>𝑆</m:t>
+                                </m:r>
+                                <m:d>
+                                  <m:dPr>
+                                    <m:ctrlPr>
+                                      <a:rPr lang="ar-AE" i="1">
+                                        <a:latin typeface="Cambria Math" panose="02040503050406030204" pitchFamily="18" charset="0"/>
+                                      </a:rPr>
+                                    </m:ctrlPr>
+                                  </m:dPr>
+                                  <m:e>
+                                    <m:r>
+                                      <a:rPr lang="ar-AE">
+                                        <a:latin typeface="Cambria Math" panose="02040503050406030204" pitchFamily="18" charset="0"/>
+                                      </a:rPr>
+                                      <m:t>𝑖</m:t>
+                                    </m:r>
+                                    <m:r>
+                                      <a:rPr lang="ar-AE">
+                                        <a:latin typeface="Cambria Math" panose="02040503050406030204" pitchFamily="18" charset="0"/>
+                                      </a:rPr>
+                                      <m:t>,</m:t>
+                                    </m:r>
+                                    <m:r>
+                                      <a:rPr lang="ar-AE">
+                                        <a:latin typeface="Cambria Math" panose="02040503050406030204" pitchFamily="18" charset="0"/>
+                                      </a:rPr>
+                                      <m:t>𝑗</m:t>
+                                    </m:r>
+                                    <m:r>
+                                      <a:rPr lang="ar-AE">
+                                        <a:latin typeface="Cambria Math" panose="02040503050406030204" pitchFamily="18" charset="0"/>
+                                      </a:rPr>
+                                      <m:t>−1</m:t>
+                                    </m:r>
+                                  </m:e>
+                                </m:d>
+                                <m:r>
+                                  <a:rPr lang="ar-AE">
+                                    <a:latin typeface="Cambria Math" panose="02040503050406030204" pitchFamily="18" charset="0"/>
+                                  </a:rPr>
+                                  <m:t>+</m:t>
+                                </m:r>
+                                <m:r>
+                                  <a:rPr lang="ar-AE">
+                                    <a:latin typeface="Cambria Math" panose="02040503050406030204" pitchFamily="18" charset="0"/>
+                                  </a:rPr>
+                                  <m:t>𝑔</m:t>
+                                </m:r>
+                              </m:e>
+                              <m:e>
+                                <m:r>
+                                  <m:rPr>
+                                    <m:nor/>
+                                  </m:rPr>
+                                  <a:rPr lang="ar-AE"/>
+                                  <m:t>(</m:t>
+                                </m:r>
+                                <m:r>
+                                  <m:rPr>
+                                    <m:nor/>
+                                  </m:rPr>
+                                  <a:rPr lang="en-US"/>
+                                  <m:t>Gap</m:t>
+                                </m:r>
+                                <m:r>
+                                  <m:rPr>
+                                    <m:nor/>
+                                  </m:rPr>
+                                  <a:rPr lang="en-US"/>
+                                  <m:t> </m:t>
+                                </m:r>
+                                <m:r>
+                                  <m:rPr>
+                                    <m:nor/>
+                                  </m:rPr>
+                                  <a:rPr lang="en-US"/>
+                                  <m:t>in</m:t>
+                                </m:r>
+                                <m:r>
+                                  <m:rPr>
+                                    <m:nor/>
+                                  </m:rPr>
+                                  <a:rPr lang="en-US"/>
+                                  <m:t> </m:t>
+                                </m:r>
+                                <m:r>
+                                  <a:rPr lang="en-US">
+                                    <a:latin typeface="Cambria Math" panose="02040503050406030204" pitchFamily="18" charset="0"/>
+                                  </a:rPr>
+                                  <m:t>𝑋</m:t>
+                                </m:r>
+                                <m:r>
+                                  <m:rPr>
+                                    <m:nor/>
+                                  </m:rPr>
+                                  <a:rPr lang="en-US"/>
                                   <m:t>)</m:t>
                                 </m:r>
                               </m:e>
@@ -5550,18 +5709,19 @@
                     </m:oMath>
                   </m:oMathPara>
                 </a14:m>
+                <a:endParaRPr lang="ar-AE" dirty="0"/>
               </a:p>
               <a:p>
-                <a:pPr lvl="0" indent="0" marL="0">
+                <a:pPr marL="0" lvl="0" indent="0">
                   <a:buNone/>
                 </a:pPr>
                 <a:r>
-                  <a:rPr/>
+                  <a:rPr lang="en-US" dirty="0"/>
                   <a:t>for example, where</a:t>
                 </a:r>
               </a:p>
               <a:p>
-                <a:pPr lvl="0" indent="0" marL="0">
+                <a:pPr marL="0" lvl="0" indent="0">
                   <a:buNone/>
                 </a:pPr>
                 <a14:m>
@@ -5569,98 +5729,90 @@
                     <m:oMathParaPr>
                       <m:jc m:val="center"/>
                     </m:oMathParaPr>
-                    <m:oMath>
+                    <m:oMath xmlns:m="http://schemas.openxmlformats.org/officeDocument/2006/math">
                       <m:r>
-                        <m:t>g</m:t>
+                        <a:rPr lang="en-US">
+                          <a:latin typeface="Cambria Math" panose="02040503050406030204" pitchFamily="18" charset="0"/>
+                        </a:rPr>
+                        <m:t>𝑔</m:t>
                       </m:r>
                       <m:r>
-                        <m:rPr>
-                          <m:sty m:val="p"/>
-                        </m:rPr>
-                        <m:t>=</m:t>
+                        <a:rPr lang="en-US">
+                          <a:latin typeface="Cambria Math" panose="02040503050406030204" pitchFamily="18" charset="0"/>
+                        </a:rPr>
+                        <m:t>=−1,</m:t>
                       </m:r>
                       <m:r>
-                        <m:rPr>
-                          <m:sty m:val="p"/>
-                        </m:rPr>
-                        <m:t>−</m:t>
+                        <a:rPr lang="en-US">
+                          <a:latin typeface="Cambria Math" panose="02040503050406030204" pitchFamily="18" charset="0"/>
+                        </a:rPr>
+                        <m:t>𝑚𝑎𝑡𝑐h</m:t>
                       </m:r>
                       <m:r>
-                        <m:t>1</m:t>
+                        <a:rPr lang="en-US">
+                          <a:latin typeface="Cambria Math" panose="02040503050406030204" pitchFamily="18" charset="0"/>
+                        </a:rPr>
+                        <m:t>=1,</m:t>
                       </m:r>
                       <m:r>
-                        <m:t>m</m:t>
+                        <a:rPr lang="en-US">
+                          <a:latin typeface="Cambria Math" panose="02040503050406030204" pitchFamily="18" charset="0"/>
+                        </a:rPr>
+                        <m:t>𝑚𝑖𝑠𝑚𝑎𝑡𝑐h</m:t>
                       </m:r>
                       <m:r>
-                        <m:t>a</m:t>
-                      </m:r>
-                      <m:r>
-                        <m:t>t</m:t>
-                      </m:r>
-                      <m:r>
-                        <m:t>c</m:t>
-                      </m:r>
-                      <m:r>
-                        <m:t>h</m:t>
-                      </m:r>
-                      <m:r>
-                        <m:rPr>
-                          <m:sty m:val="p"/>
-                        </m:rPr>
-                        <m:t>=</m:t>
-                      </m:r>
-                      <m:r>
-                        <m:t>1</m:t>
-                      </m:r>
-                      <m:r>
-                        <m:t>m</m:t>
-                      </m:r>
-                      <m:r>
-                        <m:t>i</m:t>
-                      </m:r>
-                      <m:r>
-                        <m:t>s</m:t>
-                      </m:r>
-                      <m:r>
-                        <m:t>m</m:t>
-                      </m:r>
-                      <m:r>
-                        <m:t>a</m:t>
-                      </m:r>
-                      <m:r>
-                        <m:t>t</m:t>
-                      </m:r>
-                      <m:r>
-                        <m:t>c</m:t>
-                      </m:r>
-                      <m:r>
-                        <m:t>h</m:t>
-                      </m:r>
-                      <m:r>
-                        <m:rPr>
-                          <m:sty m:val="p"/>
-                        </m:rPr>
-                        <m:t>=</m:t>
-                      </m:r>
-                      <m:r>
-                        <m:rPr>
-                          <m:sty m:val="p"/>
-                        </m:rPr>
-                        <m:t>−</m:t>
-                      </m:r>
-                      <m:r>
-                        <m:t>2</m:t>
+                        <a:rPr lang="en-US">
+                          <a:latin typeface="Cambria Math" panose="02040503050406030204" pitchFamily="18" charset="0"/>
+                        </a:rPr>
+                        <m:t>=−1</m:t>
                       </m:r>
                     </m:oMath>
                   </m:oMathPara>
                 </a14:m>
+                <a:endParaRPr dirty="0"/>
               </a:p>
             </p:txBody>
           </p:sp>
         </mc:Choice>
+        <mc:Fallback>
+          <p:sp>
+            <p:nvSpPr>
+              <p:cNvPr id="3" name="Content Placeholder 2"/>
+              <p:cNvSpPr>
+                <a:spLocks noGrp="1" noRot="1" noChangeAspect="1" noMove="1" noResize="1" noEditPoints="1" noAdjustHandles="1" noChangeArrowheads="1" noChangeShapeType="1" noTextEdit="1"/>
+              </p:cNvSpPr>
+              <p:nvPr>
+                <p:ph idx="1"/>
+              </p:nvPr>
+            </p:nvSpPr>
+            <p:spPr>
+              <a:blipFill>
+                <a:blip r:embed="rId2"/>
+                <a:stretch>
+                  <a:fillRect l="-1235" t="-3017" b="-431"/>
+                </a:stretch>
+              </a:blipFill>
+            </p:spPr>
+            <p:txBody>
+              <a:bodyPr/>
+              <a:lstStyle/>
+              <a:p>
+                <a:r>
+                  <a:rPr lang="en-US">
+                    <a:noFill/>
+                  </a:rPr>
+                  <a:t> </a:t>
+                </a:r>
+              </a:p>
+            </p:txBody>
+          </p:sp>
+        </mc:Fallback>
       </mc:AlternateContent>
     </p:spTree>
   </p:cSld>
+  <p:clrMapOvr>
+    <a:masterClrMapping/>
+  </p:clrMapOvr>
 </p:sld>
 </file>
 
@@ -5704,11 +5856,10 @@
           <a:bodyPr/>
           <a:lstStyle/>
           <a:p>
-            <a:pPr lvl="0" indent="0" marL="0">
+            <a:pPr marL="0" lvl="0" indent="0">
               <a:buNone/>
             </a:pPr>
             <a:r>
-              <a:rPr/>
               <a:t>CSC 483: Applied Biological Data Science</a:t>
             </a:r>
           </a:p>
@@ -5726,82 +5877,73 @@
         </p:nvSpPr>
         <p:spPr/>
         <p:txBody>
-          <a:bodyPr/>
+          <a:bodyPr>
+            <a:normAutofit fontScale="70000" lnSpcReduction="20000"/>
+          </a:bodyPr>
           <a:lstStyle/>
           <a:p>
             <a:pPr lvl="0"/>
             <a:r>
-              <a:rPr/>
               <a:t>Warm up: (15’)</a:t>
             </a:r>
           </a:p>
           <a:p>
             <a:pPr lvl="0"/>
             <a:r>
-              <a:rPr/>
               <a:t>Sequencing data (30’)</a:t>
             </a:r>
           </a:p>
           <a:p>
             <a:pPr lvl="1"/>
             <a:r>
-              <a:rPr/>
               <a:t>Gene seqeuence interpretation</a:t>
             </a:r>
           </a:p>
           <a:p>
             <a:pPr lvl="1"/>
             <a:r>
-              <a:rPr/>
               <a:t>Gene content vs. expression</a:t>
             </a:r>
           </a:p>
           <a:p>
             <a:pPr lvl="1"/>
             <a:r>
-              <a:rPr/>
               <a:t>Analysis goals: gene function, use</a:t>
             </a:r>
           </a:p>
           <a:p>
             <a:pPr lvl="0"/>
             <a:r>
-              <a:rPr/>
               <a:t>Activity: metadata summaries (45’)</a:t>
             </a:r>
           </a:p>
           <a:p>
             <a:pPr lvl="0"/>
             <a:r>
-              <a:rPr/>
               <a:t>Present results, brainstorm ideas (15’)</a:t>
             </a:r>
           </a:p>
           <a:p>
             <a:pPr lvl="0"/>
             <a:r>
-              <a:rPr/>
               <a:t>HW:</a:t>
             </a:r>
           </a:p>
           <a:p>
             <a:pPr lvl="1"/>
             <a:r>
-              <a:rPr/>
               <a:t>rosalind problems on sequence analysis (w/ colab notebooks?)</a:t>
             </a:r>
           </a:p>
           <a:p>
             <a:pPr lvl="1"/>
             <a:r>
-              <a:rPr/>
               <a:t>pull request of e coli metadata analysis</a:t>
             </a:r>
           </a:p>
           <a:p>
             <a:pPr lvl="1"/>
             <a:r>
-              <a:rPr/>
               <a:t>due: tues</a:t>
             </a:r>
           </a:p>
@@ -5809,6 +5951,9 @@
       </p:sp>
     </p:spTree>
   </p:cSld>
+  <p:clrMapOvr>
+    <a:masterClrMapping/>
+  </p:clrMapOvr>
   <p:timing>
     <p:tnLst>
       <p:par>
@@ -6424,11 +6569,10 @@
           <a:bodyPr/>
           <a:lstStyle/>
           <a:p>
-            <a:pPr lvl="0" indent="0" marL="0">
+            <a:pPr marL="0" lvl="0" indent="0">
               <a:buNone/>
             </a:pPr>
             <a:r>
-              <a:rPr/>
               <a:t>Demo filled</a:t>
             </a:r>
           </a:p>
@@ -6436,7 +6580,7 @@
       </p:sp>
       <p:pic>
         <p:nvPicPr>
-          <p:cNvPr descr="NW_ex_filled.png" id="0" name="Picture 1"/>
+          <p:cNvPr id="3" name="Picture 1" descr="NW_ex_filled.png"/>
           <p:cNvPicPr>
             <a:picLocks noGrp="1" noChangeAspect="1"/>
           </p:cNvPicPr>
@@ -6466,6 +6610,9 @@
       </p:pic>
     </p:spTree>
   </p:cSld>
+  <p:clrMapOvr>
+    <a:masterClrMapping/>
+  </p:clrMapOvr>
 </p:sld>
 </file>
 
@@ -6509,11 +6656,10 @@
           <a:bodyPr/>
           <a:lstStyle/>
           <a:p>
-            <a:pPr lvl="0" indent="0" marL="0">
+            <a:pPr marL="0" lvl="0" indent="0">
               <a:buNone/>
             </a:pPr>
             <a:r>
-              <a:rPr/>
               <a:t>Intructions for the Needleman-Wunsch Alg</a:t>
             </a:r>
           </a:p>
@@ -6533,56 +6679,87 @@
             </p:nvSpPr>
             <p:spPr/>
             <p:txBody>
-              <a:bodyPr/>
+              <a:bodyPr>
+                <a:normAutofit fontScale="32500" lnSpcReduction="20000"/>
+              </a:bodyPr>
               <a:lstStyle/>
               <a:p>
-                <a:pPr lvl="0" indent="0" marL="0">
+                <a:pPr marL="0" lvl="0" indent="0">
                   <a:buNone/>
                 </a:pPr>
                 <a:r>
-                  <a:rPr/>
                   <a:t>Given a mismatch scoring scheme </a:t>
                 </a:r>
                 <a14:m>
                   <m:oMath xmlns:m="http://schemas.openxmlformats.org/officeDocument/2006/math">
                     <m:r>
-                      <m:t>s</m:t>
+                      <a:rPr>
+                        <a:latin typeface="Cambria Math" panose="02040503050406030204" pitchFamily="18" charset="0"/>
+                      </a:rPr>
+                      <m:t>𝑠</m:t>
                     </m:r>
                     <m:d>
                       <m:dPr>
-                        <m:begChr m:val="("/>
-                        <m:sepChr m:val=""/>
-                        <m:endChr m:val=")"/>
-                        <m:grow/>
+                        <m:ctrlPr>
+                          <a:rPr i="1">
+                            <a:latin typeface="Cambria Math" panose="02040503050406030204" pitchFamily="18" charset="0"/>
+                          </a:rPr>
+                        </m:ctrlPr>
                       </m:dPr>
                       <m:e>
                         <m:sSub>
+                          <m:sSubPr>
+                            <m:ctrlPr>
+                              <a:rPr i="1">
+                                <a:latin typeface="Cambria Math" panose="02040503050406030204" pitchFamily="18" charset="0"/>
+                              </a:rPr>
+                            </m:ctrlPr>
+                          </m:sSubPr>
                           <m:e>
                             <m:r>
-                              <m:t>x</m:t>
+                              <a:rPr>
+                                <a:latin typeface="Cambria Math" panose="02040503050406030204" pitchFamily="18" charset="0"/>
+                              </a:rPr>
+                              <m:t>𝑥</m:t>
                             </m:r>
                           </m:e>
                           <m:sub>
                             <m:r>
-                              <m:t>i</m:t>
+                              <a:rPr>
+                                <a:latin typeface="Cambria Math" panose="02040503050406030204" pitchFamily="18" charset="0"/>
+                              </a:rPr>
+                              <m:t>𝑖</m:t>
                             </m:r>
                           </m:sub>
                         </m:sSub>
                         <m:r>
-                          <m:rPr>
-                            <m:sty m:val="p"/>
-                          </m:rPr>
+                          <a:rPr>
+                            <a:latin typeface="Cambria Math" panose="02040503050406030204" pitchFamily="18" charset="0"/>
+                          </a:rPr>
                           <m:t>,</m:t>
                         </m:r>
                         <m:sSub>
+                          <m:sSubPr>
+                            <m:ctrlPr>
+                              <a:rPr i="1">
+                                <a:latin typeface="Cambria Math" panose="02040503050406030204" pitchFamily="18" charset="0"/>
+                              </a:rPr>
+                            </m:ctrlPr>
+                          </m:sSubPr>
                           <m:e>
                             <m:r>
-                              <m:t>y</m:t>
+                              <a:rPr>
+                                <a:latin typeface="Cambria Math" panose="02040503050406030204" pitchFamily="18" charset="0"/>
+                              </a:rPr>
+                              <m:t>𝑦</m:t>
                             </m:r>
                           </m:e>
                           <m:sub>
                             <m:r>
-                              <m:t>j</m:t>
+                              <a:rPr>
+                                <a:latin typeface="Cambria Math" panose="02040503050406030204" pitchFamily="18" charset="0"/>
+                              </a:rPr>
+                              <m:t>𝑗</m:t>
                             </m:r>
                           </m:sub>
                         </m:sSub>
@@ -6591,85 +6768,114 @@
                   </m:oMath>
                 </a14:m>
                 <a:r>
-                  <a:rPr/>
                   <a:t> where </a:t>
                 </a:r>
                 <a14:m>
                   <m:oMath xmlns:m="http://schemas.openxmlformats.org/officeDocument/2006/math">
                     <m:sSub>
+                      <m:sSubPr>
+                        <m:ctrlPr>
+                          <a:rPr>
+                            <a:latin typeface="Cambria Math" panose="02040503050406030204" pitchFamily="18" charset="0"/>
+                          </a:rPr>
+                        </m:ctrlPr>
+                      </m:sSubPr>
                       <m:e>
                         <m:r>
-                          <m:t>x</m:t>
+                          <a:rPr>
+                            <a:latin typeface="Cambria Math" panose="02040503050406030204" pitchFamily="18" charset="0"/>
+                          </a:rPr>
+                          <m:t>𝑥</m:t>
                         </m:r>
                       </m:e>
                       <m:sub>
                         <m:r>
-                          <m:t>i</m:t>
+                          <a:rPr>
+                            <a:latin typeface="Cambria Math" panose="02040503050406030204" pitchFamily="18" charset="0"/>
+                          </a:rPr>
+                          <m:t>𝑖</m:t>
                         </m:r>
                       </m:sub>
                     </m:sSub>
                   </m:oMath>
                 </a14:m>
                 <a:r>
-                  <a:rPr/>
                   <a:t> and </a:t>
                 </a:r>
                 <a14:m>
                   <m:oMath xmlns:m="http://schemas.openxmlformats.org/officeDocument/2006/math">
                     <m:sSub>
+                      <m:sSubPr>
+                        <m:ctrlPr>
+                          <a:rPr>
+                            <a:latin typeface="Cambria Math" panose="02040503050406030204" pitchFamily="18" charset="0"/>
+                          </a:rPr>
+                        </m:ctrlPr>
+                      </m:sSubPr>
                       <m:e>
                         <m:r>
-                          <m:t>y</m:t>
+                          <a:rPr>
+                            <a:latin typeface="Cambria Math" panose="02040503050406030204" pitchFamily="18" charset="0"/>
+                          </a:rPr>
+                          <m:t>𝑦</m:t>
                         </m:r>
                       </m:e>
                       <m:sub>
                         <m:r>
-                          <m:t>i</m:t>
+                          <a:rPr>
+                            <a:latin typeface="Cambria Math" panose="02040503050406030204" pitchFamily="18" charset="0"/>
+                          </a:rPr>
+                          <m:t>𝑖</m:t>
                         </m:r>
                       </m:sub>
                     </m:sSub>
                   </m:oMath>
                 </a14:m>
                 <a:r>
-                  <a:rPr/>
                   <a:t> are nucleotides and </a:t>
                 </a:r>
                 <a14:m>
                   <m:oMath xmlns:m="http://schemas.openxmlformats.org/officeDocument/2006/math">
                     <m:r>
-                      <m:t>g</m:t>
+                      <a:rPr>
+                        <a:latin typeface="Cambria Math" panose="02040503050406030204" pitchFamily="18" charset="0"/>
+                      </a:rPr>
+                      <m:t>𝑔</m:t>
                     </m:r>
                   </m:oMath>
                 </a14:m>
                 <a:r>
-                  <a:rPr/>
                   <a:t> is a gap penalty, the optimal aligmnet score of two nucleotide sequences Seq1 and Seq2, indexed by </a:t>
                 </a:r>
                 <a14:m>
                   <m:oMath xmlns:m="http://schemas.openxmlformats.org/officeDocument/2006/math">
                     <m:r>
-                      <m:t>j</m:t>
+                      <a:rPr>
+                        <a:latin typeface="Cambria Math" panose="02040503050406030204" pitchFamily="18" charset="0"/>
+                      </a:rPr>
+                      <m:t>𝑗</m:t>
                     </m:r>
                   </m:oMath>
                 </a14:m>
                 <a:r>
-                  <a:rPr/>
                   <a:t> and </a:t>
                 </a:r>
                 <a14:m>
                   <m:oMath xmlns:m="http://schemas.openxmlformats.org/officeDocument/2006/math">
                     <m:r>
-                      <m:t>i</m:t>
+                      <a:rPr>
+                        <a:latin typeface="Cambria Math" panose="02040503050406030204" pitchFamily="18" charset="0"/>
+                      </a:rPr>
+                      <m:t>𝑖</m:t>
                     </m:r>
                   </m:oMath>
                 </a14:m>
                 <a:r>
-                  <a:rPr/>
                   <a:t> respectively, is :</a:t>
                 </a:r>
               </a:p>
               <a:p>
-                <a:pPr lvl="0" indent="0" marL="0">
+                <a:pPr marL="0" lvl="0" indent="0">
                   <a:buNone/>
                 </a:pPr>
                 <a14:m>
@@ -6677,160 +6883,202 @@
                     <m:oMathParaPr>
                       <m:jc m:val="center"/>
                     </m:oMathParaPr>
-                    <m:oMath>
+                    <m:oMath xmlns:m="http://schemas.openxmlformats.org/officeDocument/2006/math">
                       <m:r>
-                        <m:t>S</m:t>
+                        <a:rPr>
+                          <a:latin typeface="Cambria Math" panose="02040503050406030204" pitchFamily="18" charset="0"/>
+                        </a:rPr>
+                        <m:t>𝑆</m:t>
                       </m:r>
                       <m:d>
                         <m:dPr>
-                          <m:begChr m:val="("/>
-                          <m:sepChr m:val=""/>
-                          <m:endChr m:val=")"/>
-                          <m:grow/>
+                          <m:ctrlPr>
+                            <a:rPr i="1">
+                              <a:latin typeface="Cambria Math" panose="02040503050406030204" pitchFamily="18" charset="0"/>
+                            </a:rPr>
+                          </m:ctrlPr>
                         </m:dPr>
                         <m:e>
                           <m:r>
-                            <m:t>i</m:t>
+                            <a:rPr>
+                              <a:latin typeface="Cambria Math" panose="02040503050406030204" pitchFamily="18" charset="0"/>
+                            </a:rPr>
+                            <m:t>𝑖</m:t>
                           </m:r>
                           <m:r>
-                            <m:rPr>
-                              <m:sty m:val="p"/>
-                            </m:rPr>
+                            <a:rPr>
+                              <a:latin typeface="Cambria Math" panose="02040503050406030204" pitchFamily="18" charset="0"/>
+                            </a:rPr>
                             <m:t>,</m:t>
                           </m:r>
                           <m:r>
-                            <m:t>j</m:t>
+                            <a:rPr>
+                              <a:latin typeface="Cambria Math" panose="02040503050406030204" pitchFamily="18" charset="0"/>
+                            </a:rPr>
+                            <m:t>𝑗</m:t>
                           </m:r>
                         </m:e>
                       </m:d>
                       <m:r>
-                        <m:rPr>
-                          <m:sty m:val="p"/>
-                        </m:rPr>
+                        <a:rPr>
+                          <a:latin typeface="Cambria Math" panose="02040503050406030204" pitchFamily="18" charset="0"/>
+                        </a:rPr>
                         <m:t>=</m:t>
                       </m:r>
                       <m:r>
                         <m:rPr>
                           <m:sty m:val="p"/>
                         </m:rPr>
+                        <a:rPr>
+                          <a:latin typeface="Cambria Math" panose="02040503050406030204" pitchFamily="18" charset="0"/>
+                        </a:rPr>
                         <m:t>max</m:t>
                       </m:r>
                       <m:d>
                         <m:dPr>
                           <m:begChr m:val="{"/>
-                          <m:sepChr m:val=""/>
                           <m:endChr m:val=""/>
-                          <m:grow/>
+                          <m:ctrlPr>
+                            <a:rPr i="1">
+                              <a:latin typeface="Cambria Math" panose="02040503050406030204" pitchFamily="18" charset="0"/>
+                            </a:rPr>
+                          </m:ctrlPr>
                         </m:dPr>
                         <m:e>
                           <m:m>
                             <m:mPr>
-                              <m:baseJc m:val="center"/>
                               <m:plcHide m:val="on"/>
                               <m:mcs>
                                 <m:mc>
                                   <m:mcPr>
-                                    <m:mcJc m:val="left"/>
-                                    <m:count m:val="1"/>
-                                  </m:mcPr>
-                                </m:mc>
-                                <m:mc>
-                                  <m:mcPr>
-                                    <m:mcJc m:val="left"/>
-                                    <m:count m:val="1"/>
+                                    <m:count m:val="2"/>
+                                    <m:mcJc m:val="center"/>
                                   </m:mcPr>
                                 </m:mc>
                               </m:mcs>
+                              <m:ctrlPr>
+                                <a:rPr i="1">
+                                  <a:latin typeface="Cambria Math" panose="02040503050406030204" pitchFamily="18" charset="0"/>
+                                </a:rPr>
+                              </m:ctrlPr>
                             </m:mPr>
                             <m:mr>
                               <m:e>
                                 <m:r>
-                                  <m:t>S</m:t>
+                                  <a:rPr>
+                                    <a:latin typeface="Cambria Math" panose="02040503050406030204" pitchFamily="18" charset="0"/>
+                                  </a:rPr>
+                                  <m:t>𝑆</m:t>
                                 </m:r>
                                 <m:d>
                                   <m:dPr>
-                                    <m:begChr m:val="("/>
-                                    <m:sepChr m:val=""/>
-                                    <m:endChr m:val=")"/>
-                                    <m:grow/>
+                                    <m:ctrlPr>
+                                      <a:rPr i="1">
+                                        <a:latin typeface="Cambria Math" panose="02040503050406030204" pitchFamily="18" charset="0"/>
+                                      </a:rPr>
+                                    </m:ctrlPr>
                                   </m:dPr>
                                   <m:e>
                                     <m:r>
-                                      <m:t>i</m:t>
+                                      <a:rPr>
+                                        <a:latin typeface="Cambria Math" panose="02040503050406030204" pitchFamily="18" charset="0"/>
+                                      </a:rPr>
+                                      <m:t>𝑖</m:t>
                                     </m:r>
                                     <m:r>
-                                      <m:rPr>
-                                        <m:sty m:val="p"/>
-                                      </m:rPr>
-                                      <m:t>−</m:t>
+                                      <a:rPr>
+                                        <a:latin typeface="Cambria Math" panose="02040503050406030204" pitchFamily="18" charset="0"/>
+                                      </a:rPr>
+                                      <m:t>−1,</m:t>
                                     </m:r>
                                     <m:r>
-                                      <m:t>1</m:t>
+                                      <a:rPr>
+                                        <a:latin typeface="Cambria Math" panose="02040503050406030204" pitchFamily="18" charset="0"/>
+                                      </a:rPr>
+                                      <m:t>𝑗</m:t>
                                     </m:r>
                                     <m:r>
-                                      <m:rPr>
-                                        <m:sty m:val="p"/>
-                                      </m:rPr>
-                                      <m:t>,</m:t>
-                                    </m:r>
-                                    <m:r>
-                                      <m:t>j</m:t>
-                                    </m:r>
-                                    <m:r>
-                                      <m:rPr>
-                                        <m:sty m:val="p"/>
-                                      </m:rPr>
-                                      <m:t>−</m:t>
-                                    </m:r>
-                                    <m:r>
-                                      <m:t>1</m:t>
+                                      <a:rPr>
+                                        <a:latin typeface="Cambria Math" panose="02040503050406030204" pitchFamily="18" charset="0"/>
+                                      </a:rPr>
+                                      <m:t>−1</m:t>
                                     </m:r>
                                   </m:e>
                                 </m:d>
                                 <m:r>
-                                  <m:rPr>
-                                    <m:sty m:val="p"/>
-                                  </m:rPr>
+                                  <a:rPr>
+                                    <a:latin typeface="Cambria Math" panose="02040503050406030204" pitchFamily="18" charset="0"/>
+                                  </a:rPr>
                                   <m:t>+</m:t>
                                 </m:r>
                                 <m:r>
-                                  <m:t>s</m:t>
+                                  <a:rPr>
+                                    <a:latin typeface="Cambria Math" panose="02040503050406030204" pitchFamily="18" charset="0"/>
+                                  </a:rPr>
+                                  <m:t>𝑠</m:t>
                                 </m:r>
                                 <m:d>
                                   <m:dPr>
-                                    <m:begChr m:val="("/>
-                                    <m:sepChr m:val=""/>
-                                    <m:endChr m:val=")"/>
-                                    <m:grow/>
+                                    <m:ctrlPr>
+                                      <a:rPr i="1">
+                                        <a:latin typeface="Cambria Math" panose="02040503050406030204" pitchFamily="18" charset="0"/>
+                                      </a:rPr>
+                                    </m:ctrlPr>
                                   </m:dPr>
                                   <m:e>
                                     <m:sSub>
+                                      <m:sSubPr>
+                                        <m:ctrlPr>
+                                          <a:rPr i="1">
+                                            <a:latin typeface="Cambria Math" panose="02040503050406030204" pitchFamily="18" charset="0"/>
+                                          </a:rPr>
+                                        </m:ctrlPr>
+                                      </m:sSubPr>
                                       <m:e>
                                         <m:r>
-                                          <m:t>x</m:t>
+                                          <a:rPr>
+                                            <a:latin typeface="Cambria Math" panose="02040503050406030204" pitchFamily="18" charset="0"/>
+                                          </a:rPr>
+                                          <m:t>𝑥</m:t>
                                         </m:r>
                                       </m:e>
                                       <m:sub>
                                         <m:r>
-                                          <m:t>i</m:t>
+                                          <a:rPr>
+                                            <a:latin typeface="Cambria Math" panose="02040503050406030204" pitchFamily="18" charset="0"/>
+                                          </a:rPr>
+                                          <m:t>𝑖</m:t>
                                         </m:r>
                                       </m:sub>
                                     </m:sSub>
                                     <m:r>
-                                      <m:rPr>
-                                        <m:sty m:val="p"/>
-                                      </m:rPr>
+                                      <a:rPr>
+                                        <a:latin typeface="Cambria Math" panose="02040503050406030204" pitchFamily="18" charset="0"/>
+                                      </a:rPr>
                                       <m:t>,</m:t>
                                     </m:r>
                                     <m:sSub>
+                                      <m:sSubPr>
+                                        <m:ctrlPr>
+                                          <a:rPr i="1">
+                                            <a:latin typeface="Cambria Math" panose="02040503050406030204" pitchFamily="18" charset="0"/>
+                                          </a:rPr>
+                                        </m:ctrlPr>
+                                      </m:sSubPr>
                                       <m:e>
                                         <m:r>
-                                          <m:t>y</m:t>
+                                          <a:rPr>
+                                            <a:latin typeface="Cambria Math" panose="02040503050406030204" pitchFamily="18" charset="0"/>
+                                          </a:rPr>
+                                          <m:t>𝑦</m:t>
                                         </m:r>
                                       </m:e>
                                       <m:sub>
                                         <m:r>
-                                          <m:t>j</m:t>
+                                          <a:rPr>
+                                            <a:latin typeface="Cambria Math" panose="02040503050406030204" pitchFamily="18" charset="0"/>
+                                          </a:rPr>
+                                          <m:t>𝑗</m:t>
                                         </m:r>
                                       </m:sub>
                                     </m:sSub>
@@ -6841,74 +7089,50 @@
                                 <m:r>
                                   <m:rPr>
                                     <m:nor/>
-                                    <m:sty m:val="p"/>
                                   </m:rPr>
-                                  <m:t>(Match or Mismatch)</m:t>
-                                </m:r>
-                              </m:e>
-                            </m:mr>
-                            <m:mr>
-                              <m:e>
-                                <m:r>
-                                  <m:t>S</m:t>
-                                </m:r>
-                                <m:d>
-                                  <m:dPr>
-                                    <m:begChr m:val="("/>
-                                    <m:sepChr m:val=""/>
-                                    <m:endChr m:val=")"/>
-                                    <m:grow/>
-                                  </m:dPr>
-                                  <m:e>
-                                    <m:r>
-                                      <m:t>i</m:t>
-                                    </m:r>
-                                    <m:r>
-                                      <m:rPr>
-                                        <m:sty m:val="p"/>
-                                      </m:rPr>
-                                      <m:t>−</m:t>
-                                    </m:r>
-                                    <m:r>
-                                      <m:t>1</m:t>
-                                    </m:r>
-                                    <m:r>
-                                      <m:rPr>
-                                        <m:sty m:val="p"/>
-                                      </m:rPr>
-                                      <m:t>,</m:t>
-                                    </m:r>
-                                    <m:r>
-                                      <m:t>j</m:t>
-                                    </m:r>
-                                  </m:e>
-                                </m:d>
-                                <m:r>
-                                  <m:rPr>
-                                    <m:sty m:val="p"/>
-                                  </m:rPr>
-                                  <m:t>+</m:t>
-                                </m:r>
-                                <m:r>
-                                  <m:t>g</m:t>
-                                </m:r>
-                              </m:e>
-                              <m:e>
-                                <m:r>
-                                  <m:rPr>
-                                    <m:nor/>
-                                    <m:sty m:val="p"/>
-                                  </m:rPr>
-                                  <m:t>(Gap in </m:t>
-                                </m:r>
-                                <m:r>
-                                  <m:t>Y</m:t>
+                                  <a:rPr/>
+                                  <m:t>(</m:t>
                                 </m:r>
                                 <m:r>
                                   <m:rPr>
                                     <m:nor/>
-                                    <m:sty m:val="p"/>
                                   </m:rPr>
+                                  <a:rPr/>
+                                  <m:t>Match</m:t>
+                                </m:r>
+                                <m:r>
+                                  <m:rPr>
+                                    <m:nor/>
+                                  </m:rPr>
+                                  <a:rPr/>
+                                  <m:t> </m:t>
+                                </m:r>
+                                <m:r>
+                                  <m:rPr>
+                                    <m:nor/>
+                                  </m:rPr>
+                                  <a:rPr/>
+                                  <m:t>or</m:t>
+                                </m:r>
+                                <m:r>
+                                  <m:rPr>
+                                    <m:nor/>
+                                  </m:rPr>
+                                  <a:rPr/>
+                                  <m:t> </m:t>
+                                </m:r>
+                                <m:r>
+                                  <m:rPr>
+                                    <m:nor/>
+                                  </m:rPr>
+                                  <a:rPr/>
+                                  <m:t>Mismatch</m:t>
+                                </m:r>
+                                <m:r>
+                                  <m:rPr>
+                                    <m:nor/>
+                                  </m:rPr>
+                                  <a:rPr/>
                                   <m:t>)</m:t>
                                 </m:r>
                               </m:e>
@@ -6916,65 +7140,207 @@
                             <m:mr>
                               <m:e>
                                 <m:r>
-                                  <m:t>S</m:t>
+                                  <a:rPr>
+                                    <a:latin typeface="Cambria Math" panose="02040503050406030204" pitchFamily="18" charset="0"/>
+                                  </a:rPr>
+                                  <m:t>𝑆</m:t>
                                 </m:r>
                                 <m:d>
                                   <m:dPr>
-                                    <m:begChr m:val="("/>
-                                    <m:sepChr m:val=""/>
-                                    <m:endChr m:val=")"/>
-                                    <m:grow/>
+                                    <m:ctrlPr>
+                                      <a:rPr i="1">
+                                        <a:latin typeface="Cambria Math" panose="02040503050406030204" pitchFamily="18" charset="0"/>
+                                      </a:rPr>
+                                    </m:ctrlPr>
                                   </m:dPr>
                                   <m:e>
                                     <m:r>
-                                      <m:t>i</m:t>
+                                      <a:rPr>
+                                        <a:latin typeface="Cambria Math" panose="02040503050406030204" pitchFamily="18" charset="0"/>
+                                      </a:rPr>
+                                      <m:t>𝑖</m:t>
                                     </m:r>
                                     <m:r>
-                                      <m:rPr>
-                                        <m:sty m:val="p"/>
-                                      </m:rPr>
-                                      <m:t>,</m:t>
+                                      <a:rPr>
+                                        <a:latin typeface="Cambria Math" panose="02040503050406030204" pitchFamily="18" charset="0"/>
+                                      </a:rPr>
+                                      <m:t>−1,</m:t>
                                     </m:r>
                                     <m:r>
-                                      <m:t>j</m:t>
-                                    </m:r>
-                                    <m:r>
-                                      <m:rPr>
-                                        <m:sty m:val="p"/>
-                                      </m:rPr>
-                                      <m:t>−</m:t>
-                                    </m:r>
-                                    <m:r>
-                                      <m:t>1</m:t>
+                                      <a:rPr>
+                                        <a:latin typeface="Cambria Math" panose="02040503050406030204" pitchFamily="18" charset="0"/>
+                                      </a:rPr>
+                                      <m:t>𝑗</m:t>
                                     </m:r>
                                   </m:e>
                                 </m:d>
                                 <m:r>
-                                  <m:rPr>
-                                    <m:sty m:val="p"/>
-                                  </m:rPr>
+                                  <a:rPr>
+                                    <a:latin typeface="Cambria Math" panose="02040503050406030204" pitchFamily="18" charset="0"/>
+                                  </a:rPr>
                                   <m:t>+</m:t>
                                 </m:r>
                                 <m:r>
-                                  <m:t>g</m:t>
+                                  <a:rPr>
+                                    <a:latin typeface="Cambria Math" panose="02040503050406030204" pitchFamily="18" charset="0"/>
+                                  </a:rPr>
+                                  <m:t>𝑔</m:t>
                                 </m:r>
                               </m:e>
                               <m:e>
                                 <m:r>
                                   <m:rPr>
                                     <m:nor/>
-                                    <m:sty m:val="p"/>
                                   </m:rPr>
-                                  <m:t>(Gap in </m:t>
-                                </m:r>
-                                <m:r>
-                                  <m:t>X</m:t>
+                                  <a:rPr/>
+                                  <m:t>(</m:t>
                                 </m:r>
                                 <m:r>
                                   <m:rPr>
                                     <m:nor/>
-                                    <m:sty m:val="p"/>
                                   </m:rPr>
+                                  <a:rPr/>
+                                  <m:t>Gap</m:t>
+                                </m:r>
+                                <m:r>
+                                  <m:rPr>
+                                    <m:nor/>
+                                  </m:rPr>
+                                  <a:rPr/>
+                                  <m:t> </m:t>
+                                </m:r>
+                                <m:r>
+                                  <m:rPr>
+                                    <m:nor/>
+                                  </m:rPr>
+                                  <a:rPr/>
+                                  <m:t>in</m:t>
+                                </m:r>
+                                <m:r>
+                                  <m:rPr>
+                                    <m:nor/>
+                                  </m:rPr>
+                                  <a:rPr/>
+                                  <m:t> </m:t>
+                                </m:r>
+                                <m:r>
+                                  <a:rPr>
+                                    <a:latin typeface="Cambria Math" panose="02040503050406030204" pitchFamily="18" charset="0"/>
+                                  </a:rPr>
+                                  <m:t>𝑌</m:t>
+                                </m:r>
+                                <m:r>
+                                  <m:rPr>
+                                    <m:nor/>
+                                  </m:rPr>
+                                  <a:rPr/>
+                                  <m:t>)</m:t>
+                                </m:r>
+                              </m:e>
+                            </m:mr>
+                            <m:mr>
+                              <m:e>
+                                <m:r>
+                                  <a:rPr>
+                                    <a:latin typeface="Cambria Math" panose="02040503050406030204" pitchFamily="18" charset="0"/>
+                                  </a:rPr>
+                                  <m:t>𝑆</m:t>
+                                </m:r>
+                                <m:d>
+                                  <m:dPr>
+                                    <m:ctrlPr>
+                                      <a:rPr i="1">
+                                        <a:latin typeface="Cambria Math" panose="02040503050406030204" pitchFamily="18" charset="0"/>
+                                      </a:rPr>
+                                    </m:ctrlPr>
+                                  </m:dPr>
+                                  <m:e>
+                                    <m:r>
+                                      <a:rPr>
+                                        <a:latin typeface="Cambria Math" panose="02040503050406030204" pitchFamily="18" charset="0"/>
+                                      </a:rPr>
+                                      <m:t>𝑖</m:t>
+                                    </m:r>
+                                    <m:r>
+                                      <a:rPr>
+                                        <a:latin typeface="Cambria Math" panose="02040503050406030204" pitchFamily="18" charset="0"/>
+                                      </a:rPr>
+                                      <m:t>,</m:t>
+                                    </m:r>
+                                    <m:r>
+                                      <a:rPr>
+                                        <a:latin typeface="Cambria Math" panose="02040503050406030204" pitchFamily="18" charset="0"/>
+                                      </a:rPr>
+                                      <m:t>𝑗</m:t>
+                                    </m:r>
+                                    <m:r>
+                                      <a:rPr>
+                                        <a:latin typeface="Cambria Math" panose="02040503050406030204" pitchFamily="18" charset="0"/>
+                                      </a:rPr>
+                                      <m:t>−1</m:t>
+                                    </m:r>
+                                  </m:e>
+                                </m:d>
+                                <m:r>
+                                  <a:rPr>
+                                    <a:latin typeface="Cambria Math" panose="02040503050406030204" pitchFamily="18" charset="0"/>
+                                  </a:rPr>
+                                  <m:t>+</m:t>
+                                </m:r>
+                                <m:r>
+                                  <a:rPr>
+                                    <a:latin typeface="Cambria Math" panose="02040503050406030204" pitchFamily="18" charset="0"/>
+                                  </a:rPr>
+                                  <m:t>𝑔</m:t>
+                                </m:r>
+                              </m:e>
+                              <m:e>
+                                <m:r>
+                                  <m:rPr>
+                                    <m:nor/>
+                                  </m:rPr>
+                                  <a:rPr/>
+                                  <m:t>(</m:t>
+                                </m:r>
+                                <m:r>
+                                  <m:rPr>
+                                    <m:nor/>
+                                  </m:rPr>
+                                  <a:rPr/>
+                                  <m:t>Gap</m:t>
+                                </m:r>
+                                <m:r>
+                                  <m:rPr>
+                                    <m:nor/>
+                                  </m:rPr>
+                                  <a:rPr/>
+                                  <m:t> </m:t>
+                                </m:r>
+                                <m:r>
+                                  <m:rPr>
+                                    <m:nor/>
+                                  </m:rPr>
+                                  <a:rPr/>
+                                  <m:t>in</m:t>
+                                </m:r>
+                                <m:r>
+                                  <m:rPr>
+                                    <m:nor/>
+                                  </m:rPr>
+                                  <a:rPr/>
+                                  <m:t> </m:t>
+                                </m:r>
+                                <m:r>
+                                  <a:rPr>
+                                    <a:latin typeface="Cambria Math" panose="02040503050406030204" pitchFamily="18" charset="0"/>
+                                  </a:rPr>
+                                  <m:t>𝑋</m:t>
+                                </m:r>
+                                <m:r>
+                                  <m:rPr>
+                                    <m:nor/>
+                                  </m:rPr>
+                                  <a:rPr/>
                                   <m:t>)</m:t>
                                 </m:r>
                               </m:e>
@@ -6985,180 +7351,244 @@
                     </m:oMath>
                   </m:oMathPara>
                 </a14:m>
+                <a:endParaRPr/>
               </a:p>
               <a:p>
-                <a:pPr lvl="0" indent="0" marL="0">
+                <a:pPr marL="0" lvl="0" indent="0">
                   <a:buNone/>
                 </a:pPr>
                 <a:r>
-                  <a:rPr/>
                   <a:t>for example, setting</a:t>
                 </a:r>
               </a:p>
               <a:p>
-                <a:pPr lvl="0" indent="0" marL="0">
+                <a:pPr marL="0" lvl="0" indent="0">
                   <a:buNone/>
                 </a:pPr>
                 <a14:m>
-                  <m:oMath xmlns:m="http://schemas.openxmlformats.org/officeDocument/2006/math">
-                    <m:r>
-                      <m:t>s</m:t>
-                    </m:r>
-                    <m:d>
-                      <m:dPr>
-                        <m:begChr m:val="("/>
-                        <m:sepChr m:val=""/>
-                        <m:endChr m:val=")"/>
-                        <m:grow/>
-                      </m:dPr>
-                      <m:e>
-                        <m:sSub>
-                          <m:e>
-                            <m:r>
-                              <m:t>x</m:t>
-                            </m:r>
-                          </m:e>
-                          <m:sub>
-                            <m:r>
-                              <m:t>i</m:t>
-                            </m:r>
-                          </m:sub>
-                        </m:sSub>
-                        <m:r>
-                          <m:rPr>
-                            <m:sty m:val="p"/>
-                          </m:rPr>
-                          <m:t>,</m:t>
-                        </m:r>
-                        <m:sSub>
-                          <m:e>
-                            <m:r>
-                              <m:t>y</m:t>
-                            </m:r>
-                          </m:e>
-                          <m:sub>
-                            <m:r>
-                              <m:t>j</m:t>
-                            </m:r>
-                          </m:sub>
-                        </m:sSub>
-                      </m:e>
-                    </m:d>
-                    <m:r>
-                      <m:rPr>
-                        <m:sty m:val="p"/>
-                      </m:rPr>
-                      <m:t>=</m:t>
-                    </m:r>
-                    <m:d>
-                      <m:dPr>
-                        <m:begChr m:val="{"/>
-                        <m:sepChr m:val=""/>
-                        <m:endChr m:val=""/>
-                        <m:grow/>
-                      </m:dPr>
-                      <m:e>
-                        <m:m>
-                          <m:mPr>
-                            <m:baseJc m:val="center"/>
-                            <m:plcHide m:val="on"/>
-                            <m:mcs>
-                              <m:mc>
-                                <m:mcPr>
-                                  <m:mcJc m:val="left"/>
-                                  <m:count m:val="1"/>
-                                </m:mcPr>
-                              </m:mc>
-                              <m:mc>
-                                <m:mcPr>
-                                  <m:mcJc m:val="left"/>
-                                  <m:count m:val="1"/>
-                                </m:mcPr>
-                              </m:mc>
-                            </m:mcs>
-                          </m:mPr>
-                          <m:mr>
+                  <m:oMathPara xmlns:m="http://schemas.openxmlformats.org/officeDocument/2006/math">
+                    <m:oMathParaPr>
+                      <m:jc m:val="centerGroup"/>
+                    </m:oMathParaPr>
+                    <m:oMath xmlns:m="http://schemas.openxmlformats.org/officeDocument/2006/math">
+                      <m:r>
+                        <a:rPr>
+                          <a:latin typeface="Cambria Math" panose="02040503050406030204" pitchFamily="18" charset="0"/>
+                        </a:rPr>
+                        <m:t>𝑠</m:t>
+                      </m:r>
+                      <m:d>
+                        <m:dPr>
+                          <m:ctrlPr>
+                            <a:rPr i="1">
+                              <a:latin typeface="Cambria Math" panose="02040503050406030204" pitchFamily="18" charset="0"/>
+                            </a:rPr>
+                          </m:ctrlPr>
+                        </m:dPr>
+                        <m:e>
+                          <m:sSub>
+                            <m:sSubPr>
+                              <m:ctrlPr>
+                                <a:rPr i="1">
+                                  <a:latin typeface="Cambria Math" panose="02040503050406030204" pitchFamily="18" charset="0"/>
+                                </a:rPr>
+                              </m:ctrlPr>
+                            </m:sSubPr>
                             <m:e>
                               <m:r>
-                                <m:t>1</m:t>
+                                <a:rPr>
+                                  <a:latin typeface="Cambria Math" panose="02040503050406030204" pitchFamily="18" charset="0"/>
+                                </a:rPr>
+                                <m:t>𝑥</m:t>
                               </m:r>
                             </m:e>
+                            <m:sub>
+                              <m:r>
+                                <a:rPr>
+                                  <a:latin typeface="Cambria Math" panose="02040503050406030204" pitchFamily="18" charset="0"/>
+                                </a:rPr>
+                                <m:t>𝑖</m:t>
+                              </m:r>
+                            </m:sub>
+                          </m:sSub>
+                          <m:r>
+                            <a:rPr>
+                              <a:latin typeface="Cambria Math" panose="02040503050406030204" pitchFamily="18" charset="0"/>
+                            </a:rPr>
+                            <m:t>,</m:t>
+                          </m:r>
+                          <m:sSub>
+                            <m:sSubPr>
+                              <m:ctrlPr>
+                                <a:rPr i="1">
+                                  <a:latin typeface="Cambria Math" panose="02040503050406030204" pitchFamily="18" charset="0"/>
+                                </a:rPr>
+                              </m:ctrlPr>
+                            </m:sSubPr>
                             <m:e>
                               <m:r>
-                                <m:rPr>
-                                  <m:nor/>
-                                  <m:sty m:val="p"/>
-                                </m:rPr>
-                                <m:t>if Match</m:t>
+                                <a:rPr>
+                                  <a:latin typeface="Cambria Math" panose="02040503050406030204" pitchFamily="18" charset="0"/>
+                                </a:rPr>
+                                <m:t>𝑦</m:t>
                               </m:r>
                             </m:e>
-                          </m:mr>
-                          <m:mr>
-                            <m:e>
+                            <m:sub>
                               <m:r>
-                                <m:rPr>
-                                  <m:sty m:val="p"/>
-                                </m:rPr>
-                                <m:t>−</m:t>
+                                <a:rPr>
+                                  <a:latin typeface="Cambria Math" panose="02040503050406030204" pitchFamily="18" charset="0"/>
+                                </a:rPr>
+                                <m:t>𝑗</m:t>
                               </m:r>
-                              <m:r>
-                                <m:t>1</m:t>
-                              </m:r>
-                            </m:e>
-                            <m:e>
-                              <m:r>
-                                <m:rPr>
-                                  <m:nor/>
-                                  <m:sty m:val="p"/>
-                                </m:rPr>
-                                <m:t>if Mismatch</m:t>
-                              </m:r>
-                            </m:e>
-                          </m:mr>
-                        </m:m>
-                      </m:e>
-                    </m:d>
-                  </m:oMath>
+                            </m:sub>
+                          </m:sSub>
+                        </m:e>
+                      </m:d>
+                      <m:r>
+                        <a:rPr>
+                          <a:latin typeface="Cambria Math" panose="02040503050406030204" pitchFamily="18" charset="0"/>
+                        </a:rPr>
+                        <m:t>=</m:t>
+                      </m:r>
+                      <m:d>
+                        <m:dPr>
+                          <m:begChr m:val="{"/>
+                          <m:endChr m:val=""/>
+                          <m:ctrlPr>
+                            <a:rPr i="1">
+                              <a:latin typeface="Cambria Math" panose="02040503050406030204" pitchFamily="18" charset="0"/>
+                            </a:rPr>
+                          </m:ctrlPr>
+                        </m:dPr>
+                        <m:e>
+                          <m:m>
+                            <m:mPr>
+                              <m:plcHide m:val="on"/>
+                              <m:mcs>
+                                <m:mc>
+                                  <m:mcPr>
+                                    <m:count m:val="2"/>
+                                    <m:mcJc m:val="center"/>
+                                  </m:mcPr>
+                                </m:mc>
+                              </m:mcs>
+                              <m:ctrlPr>
+                                <a:rPr i="1">
+                                  <a:latin typeface="Cambria Math" panose="02040503050406030204" pitchFamily="18" charset="0"/>
+                                </a:rPr>
+                              </m:ctrlPr>
+                            </m:mPr>
+                            <m:mr>
+                              <m:e>
+                                <m:r>
+                                  <a:rPr>
+                                    <a:latin typeface="Cambria Math" panose="02040503050406030204" pitchFamily="18" charset="0"/>
+                                  </a:rPr>
+                                  <m:t>1</m:t>
+                                </m:r>
+                              </m:e>
+                              <m:e>
+                                <m:r>
+                                  <m:rPr>
+                                    <m:nor/>
+                                  </m:rPr>
+                                  <a:rPr/>
+                                  <m:t>if</m:t>
+                                </m:r>
+                                <m:r>
+                                  <m:rPr>
+                                    <m:nor/>
+                                  </m:rPr>
+                                  <a:rPr/>
+                                  <m:t> </m:t>
+                                </m:r>
+                                <m:r>
+                                  <m:rPr>
+                                    <m:nor/>
+                                  </m:rPr>
+                                  <a:rPr/>
+                                  <m:t>Match</m:t>
+                                </m:r>
+                              </m:e>
+                            </m:mr>
+                            <m:mr>
+                              <m:e>
+                                <m:r>
+                                  <a:rPr>
+                                    <a:latin typeface="Cambria Math" panose="02040503050406030204" pitchFamily="18" charset="0"/>
+                                  </a:rPr>
+                                  <m:t>−1</m:t>
+                                </m:r>
+                              </m:e>
+                              <m:e>
+                                <m:r>
+                                  <m:rPr>
+                                    <m:nor/>
+                                  </m:rPr>
+                                  <a:rPr/>
+                                  <m:t>if</m:t>
+                                </m:r>
+                                <m:r>
+                                  <m:rPr>
+                                    <m:nor/>
+                                  </m:rPr>
+                                  <a:rPr/>
+                                  <m:t> </m:t>
+                                </m:r>
+                                <m:r>
+                                  <m:rPr>
+                                    <m:nor/>
+                                  </m:rPr>
+                                  <a:rPr/>
+                                  <m:t>Mismatch</m:t>
+                                </m:r>
+                              </m:e>
+                            </m:mr>
+                          </m:m>
+                        </m:e>
+                      </m:d>
+                    </m:oMath>
+                  </m:oMathPara>
                 </a14:m>
+                <a:endParaRPr/>
               </a:p>
               <a:p>
-                <a:pPr lvl="0" indent="0" marL="0">
+                <a:pPr marL="0" lvl="0" indent="0">
                   <a:buNone/>
                 </a:pPr>
                 <a14:m>
-                  <m:oMath xmlns:m="http://schemas.openxmlformats.org/officeDocument/2006/math">
-                    <m:r>
-                      <m:t>g</m:t>
-                    </m:r>
-                    <m:r>
-                      <m:rPr>
-                        <m:sty m:val="p"/>
-                      </m:rPr>
-                      <m:t>=</m:t>
-                    </m:r>
-                    <m:r>
-                      <m:rPr>
-                        <m:sty m:val="p"/>
-                      </m:rPr>
-                      <m:t>−</m:t>
-                    </m:r>
-                    <m:r>
-                      <m:t>2</m:t>
-                    </m:r>
-                  </m:oMath>
+                  <m:oMathPara xmlns:m="http://schemas.openxmlformats.org/officeDocument/2006/math">
+                    <m:oMathParaPr>
+                      <m:jc m:val="centerGroup"/>
+                    </m:oMathParaPr>
+                    <m:oMath xmlns:m="http://schemas.openxmlformats.org/officeDocument/2006/math">
+                      <m:r>
+                        <a:rPr>
+                          <a:latin typeface="Cambria Math" panose="02040503050406030204" pitchFamily="18" charset="0"/>
+                        </a:rPr>
+                        <m:t>𝑔</m:t>
+                      </m:r>
+                      <m:r>
+                        <a:rPr>
+                          <a:latin typeface="Cambria Math" panose="02040503050406030204" pitchFamily="18" charset="0"/>
+                        </a:rPr>
+                        <m:t>=−2</m:t>
+                      </m:r>
+                    </m:oMath>
+                  </m:oMathPara>
                 </a14:m>
+                <a:endParaRPr/>
               </a:p>
               <a:p>
-                <a:pPr lvl="0" indent="0" marL="0">
+                <a:pPr marL="0" lvl="0" indent="0">
                   <a:buNone/>
                 </a:pPr>
                 <a:r>
-                  <a:rPr/>
                   <a:t>Then, fill each square as:</a:t>
                 </a:r>
               </a:p>
               <a:p>
-                <a:pPr lvl="0" indent="0" marL="0">
+                <a:pPr marL="0" lvl="0" indent="0">
                   <a:buNone/>
                 </a:pPr>
                 <a14:m>
@@ -7166,227 +7596,260 @@
                     <m:oMathParaPr>
                       <m:jc m:val="center"/>
                     </m:oMathParaPr>
-                    <m:oMath>
+                    <m:oMath xmlns:m="http://schemas.openxmlformats.org/officeDocument/2006/math">
                       <m:r>
-                        <m:t>S</m:t>
+                        <a:rPr>
+                          <a:latin typeface="Cambria Math" panose="02040503050406030204" pitchFamily="18" charset="0"/>
+                        </a:rPr>
+                        <m:t>𝑆</m:t>
                       </m:r>
                       <m:d>
                         <m:dPr>
-                          <m:begChr m:val="("/>
-                          <m:sepChr m:val=""/>
-                          <m:endChr m:val=")"/>
-                          <m:grow/>
+                          <m:ctrlPr>
+                            <a:rPr i="1">
+                              <a:latin typeface="Cambria Math" panose="02040503050406030204" pitchFamily="18" charset="0"/>
+                            </a:rPr>
+                          </m:ctrlPr>
                         </m:dPr>
                         <m:e>
                           <m:r>
-                            <m:t>i</m:t>
+                            <a:rPr>
+                              <a:latin typeface="Cambria Math" panose="02040503050406030204" pitchFamily="18" charset="0"/>
+                            </a:rPr>
+                            <m:t>𝑖</m:t>
                           </m:r>
                           <m:r>
-                            <m:rPr>
-                              <m:sty m:val="p"/>
-                            </m:rPr>
+                            <a:rPr>
+                              <a:latin typeface="Cambria Math" panose="02040503050406030204" pitchFamily="18" charset="0"/>
+                            </a:rPr>
                             <m:t>,</m:t>
                           </m:r>
                           <m:r>
-                            <m:t>j</m:t>
+                            <a:rPr>
+                              <a:latin typeface="Cambria Math" panose="02040503050406030204" pitchFamily="18" charset="0"/>
+                            </a:rPr>
+                            <m:t>𝑗</m:t>
                           </m:r>
                         </m:e>
                       </m:d>
                       <m:r>
-                        <m:rPr>
-                          <m:sty m:val="p"/>
-                        </m:rPr>
+                        <a:rPr>
+                          <a:latin typeface="Cambria Math" panose="02040503050406030204" pitchFamily="18" charset="0"/>
+                        </a:rPr>
                         <m:t>=</m:t>
                       </m:r>
                       <m:r>
                         <m:rPr>
                           <m:sty m:val="p"/>
                         </m:rPr>
+                        <a:rPr>
+                          <a:latin typeface="Cambria Math" panose="02040503050406030204" pitchFamily="18" charset="0"/>
+                        </a:rPr>
                         <m:t>max</m:t>
                       </m:r>
                       <m:d>
                         <m:dPr>
                           <m:begChr m:val="{"/>
-                          <m:sepChr m:val=""/>
                           <m:endChr m:val=""/>
-                          <m:grow/>
+                          <m:ctrlPr>
+                            <a:rPr i="1">
+                              <a:latin typeface="Cambria Math" panose="02040503050406030204" pitchFamily="18" charset="0"/>
+                            </a:rPr>
+                          </m:ctrlPr>
                         </m:dPr>
                         <m:e>
                           <m:m>
                             <m:mPr>
-                              <m:baseJc m:val="center"/>
                               <m:plcHide m:val="on"/>
                               <m:mcs>
                                 <m:mc>
                                   <m:mcPr>
-                                    <m:mcJc m:val="left"/>
-                                    <m:count m:val="1"/>
-                                  </m:mcPr>
-                                </m:mc>
-                                <m:mc>
-                                  <m:mcPr>
+                                    <m:count m:val="2"/>
                                     <m:mcJc m:val="center"/>
-                                    <m:count m:val="1"/>
                                   </m:mcPr>
                                 </m:mc>
                               </m:mcs>
+                              <m:ctrlPr>
+                                <a:rPr i="1">
+                                  <a:latin typeface="Cambria Math" panose="02040503050406030204" pitchFamily="18" charset="0"/>
+                                </a:rPr>
+                              </m:ctrlPr>
                             </m:mPr>
                             <m:mr>
                               <m:e>
                                 <m:d>
                                   <m:dPr>
                                     <m:begChr m:val="{"/>
-                                    <m:sepChr m:val=""/>
                                     <m:endChr m:val=""/>
-                                    <m:grow/>
+                                    <m:ctrlPr>
+                                      <a:rPr i="1">
+                                        <a:latin typeface="Cambria Math" panose="02040503050406030204" pitchFamily="18" charset="0"/>
+                                      </a:rPr>
+                                    </m:ctrlPr>
                                   </m:dPr>
                                   <m:e>
                                     <m:m>
                                       <m:mPr>
-                                        <m:baseJc m:val="center"/>
                                         <m:plcHide m:val="on"/>
                                         <m:mcs>
                                           <m:mc>
                                             <m:mcPr>
-                                              <m:mcJc m:val="left"/>
-                                              <m:count m:val="1"/>
-                                            </m:mcPr>
-                                          </m:mc>
-                                          <m:mc>
-                                            <m:mcPr>
-                                              <m:mcJc m:val="left"/>
-                                              <m:count m:val="1"/>
+                                              <m:count m:val="2"/>
+                                              <m:mcJc m:val="center"/>
                                             </m:mcPr>
                                           </m:mc>
                                         </m:mcs>
+                                        <m:ctrlPr>
+                                          <a:rPr i="1">
+                                            <a:latin typeface="Cambria Math" panose="02040503050406030204" pitchFamily="18" charset="0"/>
+                                          </a:rPr>
+                                        </m:ctrlPr>
                                       </m:mPr>
                                       <m:mr>
                                         <m:e>
                                           <m:r>
-                                            <m:t>S</m:t>
+                                            <a:rPr>
+                                              <a:latin typeface="Cambria Math" panose="02040503050406030204" pitchFamily="18" charset="0"/>
+                                            </a:rPr>
+                                            <m:t>𝑆</m:t>
                                           </m:r>
                                           <m:d>
                                             <m:dPr>
-                                              <m:begChr m:val="("/>
-                                              <m:sepChr m:val=""/>
-                                              <m:endChr m:val=")"/>
-                                              <m:grow/>
+                                              <m:ctrlPr>
+                                                <a:rPr i="1">
+                                                  <a:latin typeface="Cambria Math" panose="02040503050406030204" pitchFamily="18" charset="0"/>
+                                                </a:rPr>
+                                              </m:ctrlPr>
                                             </m:dPr>
                                             <m:e>
                                               <m:r>
-                                                <m:t>i</m:t>
+                                                <a:rPr>
+                                                  <a:latin typeface="Cambria Math" panose="02040503050406030204" pitchFamily="18" charset="0"/>
+                                                </a:rPr>
+                                                <m:t>𝑖</m:t>
                                               </m:r>
                                               <m:r>
-                                                <m:rPr>
-                                                  <m:sty m:val="p"/>
-                                                </m:rPr>
-                                                <m:t>−</m:t>
+                                                <a:rPr>
+                                                  <a:latin typeface="Cambria Math" panose="02040503050406030204" pitchFamily="18" charset="0"/>
+                                                </a:rPr>
+                                                <m:t>−1,</m:t>
                                               </m:r>
                                               <m:r>
-                                                <m:t>1</m:t>
+                                                <a:rPr>
+                                                  <a:latin typeface="Cambria Math" panose="02040503050406030204" pitchFamily="18" charset="0"/>
+                                                </a:rPr>
+                                                <m:t>𝑗</m:t>
                                               </m:r>
                                               <m:r>
-                                                <m:rPr>
-                                                  <m:sty m:val="p"/>
-                                                </m:rPr>
-                                                <m:t>,</m:t>
-                                              </m:r>
-                                              <m:r>
-                                                <m:t>j</m:t>
-                                              </m:r>
-                                              <m:r>
-                                                <m:rPr>
-                                                  <m:sty m:val="p"/>
-                                                </m:rPr>
-                                                <m:t>−</m:t>
-                                              </m:r>
-                                              <m:r>
-                                                <m:t>1</m:t>
+                                                <a:rPr>
+                                                  <a:latin typeface="Cambria Math" panose="02040503050406030204" pitchFamily="18" charset="0"/>
+                                                </a:rPr>
+                                                <m:t>−1</m:t>
                                               </m:r>
                                             </m:e>
                                           </m:d>
                                           <m:r>
-                                            <m:rPr>
-                                              <m:sty m:val="p"/>
-                                            </m:rPr>
-                                            <m:t>+</m:t>
-                                          </m:r>
-                                          <m:r>
-                                            <m:t>1</m:t>
+                                            <a:rPr>
+                                              <a:latin typeface="Cambria Math" panose="02040503050406030204" pitchFamily="18" charset="0"/>
+                                            </a:rPr>
+                                            <m:t>+1</m:t>
                                           </m:r>
                                         </m:e>
                                         <m:e>
                                           <m:r>
                                             <m:rPr>
                                               <m:nor/>
-                                              <m:sty m:val="p"/>
                                             </m:rPr>
-                                            <m:t>(Match)</m:t>
+                                            <a:rPr/>
+                                            <m:t>(</m:t>
+                                          </m:r>
+                                          <m:r>
+                                            <m:rPr>
+                                              <m:nor/>
+                                            </m:rPr>
+                                            <a:rPr/>
+                                            <m:t>Match</m:t>
+                                          </m:r>
+                                          <m:r>
+                                            <m:rPr>
+                                              <m:nor/>
+                                            </m:rPr>
+                                            <a:rPr/>
+                                            <m:t>)</m:t>
                                           </m:r>
                                         </m:e>
                                       </m:mr>
                                       <m:mr>
                                         <m:e>
                                           <m:r>
-                                            <m:t>S</m:t>
+                                            <a:rPr>
+                                              <a:latin typeface="Cambria Math" panose="02040503050406030204" pitchFamily="18" charset="0"/>
+                                            </a:rPr>
+                                            <m:t>𝑆</m:t>
                                           </m:r>
                                           <m:d>
                                             <m:dPr>
-                                              <m:begChr m:val="("/>
-                                              <m:sepChr m:val=""/>
-                                              <m:endChr m:val=")"/>
-                                              <m:grow/>
+                                              <m:ctrlPr>
+                                                <a:rPr i="1">
+                                                  <a:latin typeface="Cambria Math" panose="02040503050406030204" pitchFamily="18" charset="0"/>
+                                                </a:rPr>
+                                              </m:ctrlPr>
                                             </m:dPr>
                                             <m:e>
                                               <m:r>
-                                                <m:t>i</m:t>
+                                                <a:rPr>
+                                                  <a:latin typeface="Cambria Math" panose="02040503050406030204" pitchFamily="18" charset="0"/>
+                                                </a:rPr>
+                                                <m:t>𝑖</m:t>
                                               </m:r>
                                               <m:r>
-                                                <m:rPr>
-                                                  <m:sty m:val="p"/>
-                                                </m:rPr>
-                                                <m:t>−</m:t>
+                                                <a:rPr>
+                                                  <a:latin typeface="Cambria Math" panose="02040503050406030204" pitchFamily="18" charset="0"/>
+                                                </a:rPr>
+                                                <m:t>−1,</m:t>
                                               </m:r>
                                               <m:r>
-                                                <m:t>1</m:t>
+                                                <a:rPr>
+                                                  <a:latin typeface="Cambria Math" panose="02040503050406030204" pitchFamily="18" charset="0"/>
+                                                </a:rPr>
+                                                <m:t>𝑗</m:t>
                                               </m:r>
                                               <m:r>
-                                                <m:rPr>
-                                                  <m:sty m:val="p"/>
-                                                </m:rPr>
-                                                <m:t>,</m:t>
-                                              </m:r>
-                                              <m:r>
-                                                <m:t>j</m:t>
-                                              </m:r>
-                                              <m:r>
-                                                <m:rPr>
-                                                  <m:sty m:val="p"/>
-                                                </m:rPr>
-                                                <m:t>−</m:t>
-                                              </m:r>
-                                              <m:r>
-                                                <m:t>1</m:t>
+                                                <a:rPr>
+                                                  <a:latin typeface="Cambria Math" panose="02040503050406030204" pitchFamily="18" charset="0"/>
+                                                </a:rPr>
+                                                <m:t>−1</m:t>
                                               </m:r>
                                             </m:e>
                                           </m:d>
                                           <m:r>
-                                            <m:rPr>
-                                              <m:sty m:val="p"/>
-                                            </m:rPr>
-                                            <m:t>−</m:t>
-                                          </m:r>
-                                          <m:r>
-                                            <m:t>1</m:t>
+                                            <a:rPr>
+                                              <a:latin typeface="Cambria Math" panose="02040503050406030204" pitchFamily="18" charset="0"/>
+                                            </a:rPr>
+                                            <m:t>−1</m:t>
                                           </m:r>
                                         </m:e>
                                         <m:e>
                                           <m:r>
                                             <m:rPr>
                                               <m:nor/>
-                                              <m:sty m:val="p"/>
                                             </m:rPr>
-                                            <m:t>(Mismatch)</m:t>
+                                            <a:rPr/>
+                                            <m:t>(</m:t>
+                                          </m:r>
+                                          <m:r>
+                                            <m:rPr>
+                                              <m:nor/>
+                                            </m:rPr>
+                                            <a:rPr/>
+                                            <m:t>Mismatch</m:t>
+                                          </m:r>
+                                          <m:r>
+                                            <m:rPr>
+                                              <m:nor/>
+                                            </m:rPr>
+                                            <a:rPr/>
+                                            <m:t>)</m:t>
                                           </m:r>
                                         </m:e>
                                       </m:mr>
@@ -7394,69 +7857,99 @@
                                   </m:e>
                                 </m:d>
                               </m:e>
+                              <m:e/>
                             </m:mr>
                             <m:mr>
                               <m:e>
                                 <m:r>
-                                  <m:t>S</m:t>
+                                  <a:rPr>
+                                    <a:latin typeface="Cambria Math" panose="02040503050406030204" pitchFamily="18" charset="0"/>
+                                  </a:rPr>
+                                  <m:t>𝑆</m:t>
                                 </m:r>
                                 <m:d>
                                   <m:dPr>
-                                    <m:begChr m:val="("/>
-                                    <m:sepChr m:val=""/>
-                                    <m:endChr m:val=")"/>
-                                    <m:grow/>
+                                    <m:ctrlPr>
+                                      <a:rPr i="1">
+                                        <a:latin typeface="Cambria Math" panose="02040503050406030204" pitchFamily="18" charset="0"/>
+                                      </a:rPr>
+                                    </m:ctrlPr>
                                   </m:dPr>
                                   <m:e>
                                     <m:r>
-                                      <m:t>i</m:t>
+                                      <a:rPr>
+                                        <a:latin typeface="Cambria Math" panose="02040503050406030204" pitchFamily="18" charset="0"/>
+                                      </a:rPr>
+                                      <m:t>𝑖</m:t>
                                     </m:r>
                                     <m:r>
-                                      <m:rPr>
-                                        <m:sty m:val="p"/>
-                                      </m:rPr>
-                                      <m:t>−</m:t>
+                                      <a:rPr>
+                                        <a:latin typeface="Cambria Math" panose="02040503050406030204" pitchFamily="18" charset="0"/>
+                                      </a:rPr>
+                                      <m:t>−1,</m:t>
                                     </m:r>
                                     <m:r>
-                                      <m:t>1</m:t>
-                                    </m:r>
-                                    <m:r>
-                                      <m:rPr>
-                                        <m:sty m:val="p"/>
-                                      </m:rPr>
-                                      <m:t>,</m:t>
-                                    </m:r>
-                                    <m:r>
-                                      <m:t>j</m:t>
+                                      <a:rPr>
+                                        <a:latin typeface="Cambria Math" panose="02040503050406030204" pitchFamily="18" charset="0"/>
+                                      </a:rPr>
+                                      <m:t>𝑗</m:t>
                                     </m:r>
                                   </m:e>
                                 </m:d>
                                 <m:r>
-                                  <m:rPr>
-                                    <m:sty m:val="p"/>
-                                  </m:rPr>
-                                  <m:t>−</m:t>
-                                </m:r>
-                                <m:r>
-                                  <m:t>2</m:t>
+                                  <a:rPr>
+                                    <a:latin typeface="Cambria Math" panose="02040503050406030204" pitchFamily="18" charset="0"/>
+                                  </a:rPr>
+                                  <m:t>−2</m:t>
                                 </m:r>
                               </m:e>
                               <m:e>
                                 <m:r>
                                   <m:rPr>
                                     <m:nor/>
-                                    <m:sty m:val="p"/>
                                   </m:rPr>
-                                  <m:t>(Gap in </m:t>
-                                </m:r>
-                                <m:r>
-                                  <m:t>Y</m:t>
+                                  <a:rPr/>
+                                  <m:t>(</m:t>
                                 </m:r>
                                 <m:r>
                                   <m:rPr>
                                     <m:nor/>
-                                    <m:sty m:val="p"/>
                                   </m:rPr>
+                                  <a:rPr/>
+                                  <m:t>Gap</m:t>
+                                </m:r>
+                                <m:r>
+                                  <m:rPr>
+                                    <m:nor/>
+                                  </m:rPr>
+                                  <a:rPr/>
+                                  <m:t> </m:t>
+                                </m:r>
+                                <m:r>
+                                  <m:rPr>
+                                    <m:nor/>
+                                  </m:rPr>
+                                  <a:rPr/>
+                                  <m:t>in</m:t>
+                                </m:r>
+                                <m:r>
+                                  <m:rPr>
+                                    <m:nor/>
+                                  </m:rPr>
+                                  <a:rPr/>
+                                  <m:t> </m:t>
+                                </m:r>
+                                <m:r>
+                                  <a:rPr>
+                                    <a:latin typeface="Cambria Math" panose="02040503050406030204" pitchFamily="18" charset="0"/>
+                                  </a:rPr>
+                                  <m:t>𝑌</m:t>
+                                </m:r>
+                                <m:r>
+                                  <m:rPr>
+                                    <m:nor/>
+                                  </m:rPr>
+                                  <a:rPr/>
                                   <m:t>)</m:t>
                                 </m:r>
                               </m:e>
@@ -7464,65 +7957,100 @@
                             <m:mr>
                               <m:e>
                                 <m:r>
-                                  <m:t>S</m:t>
+                                  <a:rPr>
+                                    <a:latin typeface="Cambria Math" panose="02040503050406030204" pitchFamily="18" charset="0"/>
+                                  </a:rPr>
+                                  <m:t>𝑆</m:t>
                                 </m:r>
                                 <m:d>
                                   <m:dPr>
-                                    <m:begChr m:val="("/>
-                                    <m:sepChr m:val=""/>
-                                    <m:endChr m:val=")"/>
-                                    <m:grow/>
+                                    <m:ctrlPr>
+                                      <a:rPr i="1">
+                                        <a:latin typeface="Cambria Math" panose="02040503050406030204" pitchFamily="18" charset="0"/>
+                                      </a:rPr>
+                                    </m:ctrlPr>
                                   </m:dPr>
                                   <m:e>
                                     <m:r>
-                                      <m:t>i</m:t>
+                                      <a:rPr>
+                                        <a:latin typeface="Cambria Math" panose="02040503050406030204" pitchFamily="18" charset="0"/>
+                                      </a:rPr>
+                                      <m:t>𝑖</m:t>
                                     </m:r>
                                     <m:r>
-                                      <m:rPr>
-                                        <m:sty m:val="p"/>
-                                      </m:rPr>
+                                      <a:rPr>
+                                        <a:latin typeface="Cambria Math" panose="02040503050406030204" pitchFamily="18" charset="0"/>
+                                      </a:rPr>
                                       <m:t>,</m:t>
                                     </m:r>
                                     <m:r>
-                                      <m:t>j</m:t>
+                                      <a:rPr>
+                                        <a:latin typeface="Cambria Math" panose="02040503050406030204" pitchFamily="18" charset="0"/>
+                                      </a:rPr>
+                                      <m:t>𝑗</m:t>
                                     </m:r>
                                     <m:r>
-                                      <m:rPr>
-                                        <m:sty m:val="p"/>
-                                      </m:rPr>
-                                      <m:t>−</m:t>
-                                    </m:r>
-                                    <m:r>
-                                      <m:t>1</m:t>
+                                      <a:rPr>
+                                        <a:latin typeface="Cambria Math" panose="02040503050406030204" pitchFamily="18" charset="0"/>
+                                      </a:rPr>
+                                      <m:t>−1</m:t>
                                     </m:r>
                                   </m:e>
                                 </m:d>
                                 <m:r>
-                                  <m:rPr>
-                                    <m:sty m:val="p"/>
-                                  </m:rPr>
-                                  <m:t>−</m:t>
-                                </m:r>
-                                <m:r>
-                                  <m:t>2</m:t>
+                                  <a:rPr>
+                                    <a:latin typeface="Cambria Math" panose="02040503050406030204" pitchFamily="18" charset="0"/>
+                                  </a:rPr>
+                                  <m:t>−2</m:t>
                                 </m:r>
                               </m:e>
                               <m:e>
                                 <m:r>
                                   <m:rPr>
                                     <m:nor/>
-                                    <m:sty m:val="p"/>
                                   </m:rPr>
-                                  <m:t>(Gap in </m:t>
-                                </m:r>
-                                <m:r>
-                                  <m:t>X</m:t>
+                                  <a:rPr/>
+                                  <m:t>(</m:t>
                                 </m:r>
                                 <m:r>
                                   <m:rPr>
                                     <m:nor/>
-                                    <m:sty m:val="p"/>
                                   </m:rPr>
+                                  <a:rPr/>
+                                  <m:t>Gap</m:t>
+                                </m:r>
+                                <m:r>
+                                  <m:rPr>
+                                    <m:nor/>
+                                  </m:rPr>
+                                  <a:rPr/>
+                                  <m:t> </m:t>
+                                </m:r>
+                                <m:r>
+                                  <m:rPr>
+                                    <m:nor/>
+                                  </m:rPr>
+                                  <a:rPr/>
+                                  <m:t>in</m:t>
+                                </m:r>
+                                <m:r>
+                                  <m:rPr>
+                                    <m:nor/>
+                                  </m:rPr>
+                                  <a:rPr/>
+                                  <m:t> </m:t>
+                                </m:r>
+                                <m:r>
+                                  <a:rPr>
+                                    <a:latin typeface="Cambria Math" panose="02040503050406030204" pitchFamily="18" charset="0"/>
+                                  </a:rPr>
+                                  <m:t>𝑋</m:t>
+                                </m:r>
+                                <m:r>
+                                  <m:rPr>
+                                    <m:nor/>
+                                  </m:rPr>
+                                  <a:rPr/>
                                   <m:t>)</m:t>
                                 </m:r>
                               </m:e>
@@ -7533,36 +8061,33 @@
                     </m:oMath>
                   </m:oMathPara>
                 </a14:m>
+                <a:endParaRPr/>
               </a:p>
               <a:p>
-                <a:pPr lvl="0" indent="-342900" marL="342900">
+                <a:pPr marL="342900" lvl="0" indent="-342900">
                   <a:buAutoNum type="arabicPeriod"/>
                 </a:pPr>
                 <a:r>
-                  <a:rPr/>
                   <a:t>Starting in the upper left corner, initiate with 0, then, moving across columns and down rows, fill in each square with:</a:t>
                 </a:r>
               </a:p>
               <a:p>
                 <a:pPr lvl="1"/>
                 <a:r>
-                  <a:rPr/>
                   <a:t>the maximum value given the values at the previous indices</a:t>
                 </a:r>
               </a:p>
               <a:p>
                 <a:pPr lvl="1"/>
                 <a:r>
-                  <a:rPr/>
                   <a:t>the previous indices from which the value builds (diagonal, left or up arrows)</a:t>
                 </a:r>
               </a:p>
               <a:p>
-                <a:pPr lvl="0" indent="-342900" marL="342900">
-                  <a:buAutoNum startAt="2" type="arabicPeriod"/>
+                <a:pPr marL="342900" lvl="0" indent="-342900">
+                  <a:buAutoNum type="arabicPeriod" startAt="2"/>
                 </a:pPr>
                 <a:r>
-                  <a:rPr/>
                   <a:t>Once all squares are filled, </a:t>
                 </a:r>
                 <a:r>
@@ -7570,16 +8095,51 @@
                   <a:t>the bottom right corner has your best possible score</a:t>
                 </a:r>
                 <a:r>
-                  <a:rPr/>
                   <a:t>.</a:t>
                 </a:r>
               </a:p>
             </p:txBody>
           </p:sp>
         </mc:Choice>
+        <mc:Fallback>
+          <p:sp>
+            <p:nvSpPr>
+              <p:cNvPr id="3" name="Content Placeholder 2"/>
+              <p:cNvSpPr>
+                <a:spLocks noGrp="1" noRot="1" noChangeAspect="1" noMove="1" noResize="1" noEditPoints="1" noAdjustHandles="1" noChangeArrowheads="1" noChangeShapeType="1" noTextEdit="1"/>
+              </p:cNvSpPr>
+              <p:nvPr>
+                <p:ph idx="1"/>
+              </p:nvPr>
+            </p:nvSpPr>
+            <p:spPr>
+              <a:blipFill>
+                <a:blip r:embed="rId2"/>
+                <a:stretch>
+                  <a:fillRect/>
+                </a:stretch>
+              </a:blipFill>
+            </p:spPr>
+            <p:txBody>
+              <a:bodyPr/>
+              <a:lstStyle/>
+              <a:p>
+                <a:r>
+                  <a:rPr lang="en-US">
+                    <a:noFill/>
+                  </a:rPr>
+                  <a:t> </a:t>
+                </a:r>
+              </a:p>
+            </p:txBody>
+          </p:sp>
+        </mc:Fallback>
       </mc:AlternateContent>
     </p:spTree>
   </p:cSld>
+  <p:clrMapOvr>
+    <a:masterClrMapping/>
+  </p:clrMapOvr>
   <p:timing>
     <p:tnLst>
       <p:par>
@@ -7852,11 +8412,10 @@
           <a:bodyPr/>
           <a:lstStyle/>
           <a:p>
-            <a:pPr lvl="0" indent="0" marL="0">
+            <a:pPr marL="0" lvl="0" indent="0">
               <a:buNone/>
             </a:pPr>
             <a:r>
-              <a:rPr/>
               <a:t>K-mer based sequence representation</a:t>
             </a:r>
           </a:p>
@@ -7864,7 +8423,7 @@
       </p:sp>
       <p:pic>
         <p:nvPicPr>
-          <p:cNvPr descr="k-mer.jpg" id="0" name="Picture 1"/>
+          <p:cNvPr id="3" name="Picture 1" descr="k-mer.jpg"/>
           <p:cNvPicPr>
             <a:picLocks noGrp="1" noChangeAspect="1"/>
           </p:cNvPicPr>
@@ -7894,6 +8453,9 @@
       </p:pic>
     </p:spTree>
   </p:cSld>
+  <p:clrMapOvr>
+    <a:masterClrMapping/>
+  </p:clrMapOvr>
 </p:sld>
 </file>
 
@@ -7937,11 +8499,10 @@
           <a:bodyPr/>
           <a:lstStyle/>
           <a:p>
-            <a:pPr lvl="0" indent="0" marL="0">
+            <a:pPr marL="0" lvl="0" indent="0">
               <a:buNone/>
             </a:pPr>
             <a:r>
-              <a:rPr/>
               <a:t>K-mer based quantification</a:t>
             </a:r>
           </a:p>
@@ -7949,7 +8510,7 @@
       </p:sp>
       <p:pic>
         <p:nvPicPr>
-          <p:cNvPr descr="k-mer-dists.jpg" id="0" name="Picture 1"/>
+          <p:cNvPr id="3" name="Picture 1" descr="k-mer-dists.jpg"/>
           <p:cNvPicPr>
             <a:picLocks noGrp="1" noChangeAspect="1"/>
           </p:cNvPicPr>
@@ -7979,6 +8540,9 @@
       </p:pic>
     </p:spTree>
   </p:cSld>
+  <p:clrMapOvr>
+    <a:masterClrMapping/>
+  </p:clrMapOvr>
 </p:sld>
 </file>
 
@@ -8022,11 +8586,10 @@
           <a:bodyPr/>
           <a:lstStyle/>
           <a:p>
-            <a:pPr lvl="0" indent="0" marL="0">
+            <a:pPr marL="0" lvl="0" indent="0">
               <a:buNone/>
             </a:pPr>
             <a:r>
-              <a:rPr/>
               <a:t>RNA sequencing</a:t>
             </a:r>
           </a:p>
@@ -8049,35 +8612,30 @@
           <a:p>
             <a:pPr lvl="0"/>
             <a:r>
-              <a:rPr/>
               <a:t>cDNA</a:t>
             </a:r>
           </a:p>
           <a:p>
             <a:pPr lvl="0"/>
             <a:r>
-              <a:rPr/>
               <a:t>requires reference genomes</a:t>
             </a:r>
           </a:p>
           <a:p>
             <a:pPr lvl="0"/>
             <a:r>
-              <a:rPr/>
               <a:t>espression levels</a:t>
             </a:r>
           </a:p>
           <a:p>
             <a:pPr lvl="0"/>
             <a:r>
-              <a:rPr/>
               <a:t>count matrices</a:t>
             </a:r>
           </a:p>
           <a:p>
             <a:pPr lvl="0"/>
             <a:r>
-              <a:rPr/>
               <a:t>does NOT require annotations</a:t>
             </a:r>
           </a:p>
@@ -8085,6 +8643,9 @@
       </p:sp>
     </p:spTree>
   </p:cSld>
+  <p:clrMapOvr>
+    <a:masterClrMapping/>
+  </p:clrMapOvr>
   <p:timing>
     <p:tnLst>
       <p:par>
@@ -8406,11 +8967,10 @@
           <a:bodyPr/>
           <a:lstStyle/>
           <a:p>
-            <a:pPr lvl="0" indent="0" marL="0">
+            <a:pPr marL="0" lvl="0" indent="0">
               <a:buNone/>
             </a:pPr>
             <a:r>
-              <a:rPr/>
               <a:t>Analyisis workflows/goals</a:t>
             </a:r>
           </a:p>
@@ -8433,28 +8993,24 @@
           <a:p>
             <a:pPr lvl="0"/>
             <a:r>
-              <a:rPr/>
               <a:t>we want to know what cells/organisms use which genes for</a:t>
             </a:r>
           </a:p>
           <a:p>
             <a:pPr lvl="0"/>
             <a:r>
-              <a:rPr/>
               <a:t>what are gene functions?</a:t>
             </a:r>
           </a:p>
           <a:p>
             <a:pPr lvl="0"/>
             <a:r>
-              <a:rPr/>
               <a:t>when/where are genes expressed? why?</a:t>
             </a:r>
           </a:p>
           <a:p>
             <a:pPr lvl="0"/>
             <a:r>
-              <a:rPr/>
               <a:t>are there cause/effect relationships we can interfere with or engineer?</a:t>
             </a:r>
           </a:p>
@@ -8462,6 +9018,9 @@
       </p:sp>
     </p:spTree>
   </p:cSld>
+  <p:clrMapOvr>
+    <a:masterClrMapping/>
+  </p:clrMapOvr>
   <p:timing>
     <p:tnLst>
       <p:par>
@@ -8734,11 +9293,10 @@
           <a:bodyPr/>
           <a:lstStyle/>
           <a:p>
-            <a:pPr lvl="0" indent="0" marL="0">
+            <a:pPr marL="0" lvl="0" indent="0">
               <a:buNone/>
             </a:pPr>
             <a:r>
-              <a:rPr/>
               <a:t>Project goals</a:t>
             </a:r>
           </a:p>
@@ -8761,21 +9319,18 @@
           <a:p>
             <a:pPr lvl="0"/>
             <a:r>
-              <a:rPr/>
               <a:t>given dataset of E coli gene expression</a:t>
             </a:r>
           </a:p>
           <a:p>
             <a:pPr lvl="0"/>
             <a:r>
-              <a:rPr/>
               <a:t>what questions can be asked/answered?</a:t>
             </a:r>
           </a:p>
           <a:p>
             <a:pPr lvl="0"/>
             <a:r>
-              <a:rPr/>
               <a:t>how can metadata be explored? summarized?</a:t>
             </a:r>
           </a:p>
@@ -8783,6 +9338,9 @@
       </p:sp>
     </p:spTree>
   </p:cSld>
+  <p:clrMapOvr>
+    <a:masterClrMapping/>
+  </p:clrMapOvr>
   <p:timing>
     <p:tnLst>
       <p:par>
@@ -9006,11 +9564,10 @@
           <a:bodyPr/>
           <a:lstStyle/>
           <a:p>
-            <a:pPr lvl="0" indent="0" marL="0">
+            <a:pPr marL="0" lvl="0" indent="0">
               <a:buNone/>
             </a:pPr>
             <a:r>
-              <a:rPr/>
               <a:t>Lab machines: getting started</a:t>
             </a:r>
           </a:p>
@@ -9033,26 +9590,23 @@
           <a:p>
             <a:pPr lvl="0"/>
             <a:r>
-              <a:rPr/>
               <a:t>Log on:</a:t>
             </a:r>
           </a:p>
           <a:p>
             <a:pPr lvl="1"/>
             <a:r>
-              <a:rPr/>
               <a:t>Your Union usernames</a:t>
             </a:r>
           </a:p>
           <a:p>
             <a:pPr lvl="1"/>
             <a:r>
-              <a:rPr/>
               <a:t>Default password: the word union followed by your ID number; e.g., union12345</a:t>
             </a:r>
           </a:p>
           <a:p>
-            <a:pPr lvl="0" indent="0" marL="0">
+            <a:pPr marL="0" lvl="0" indent="0">
               <a:buNone/>
             </a:pPr>
             <a:r>
@@ -9064,6 +9618,9 @@
       </p:sp>
     </p:spTree>
   </p:cSld>
+  <p:clrMapOvr>
+    <a:masterClrMapping/>
+  </p:clrMapOvr>
   <p:timing>
     <p:tnLst>
       <p:par>
@@ -9287,11 +9844,10 @@
           <a:bodyPr/>
           <a:lstStyle/>
           <a:p>
-            <a:pPr lvl="0" indent="0" marL="0">
+            <a:pPr marL="0" lvl="0" indent="0">
               <a:buNone/>
             </a:pPr>
             <a:r>
-              <a:rPr/>
               <a:t>Setting up folders &amp; google drive</a:t>
             </a:r>
           </a:p>
@@ -9314,28 +9870,24 @@
           <a:p>
             <a:pPr lvl="0"/>
             <a:r>
-              <a:rPr/>
               <a:t>Create a folder for this course (e.g. names csc106).</a:t>
             </a:r>
           </a:p>
           <a:p>
             <a:pPr lvl="0"/>
             <a:r>
-              <a:rPr/>
               <a:t>share it with me (doingg@union.edu)</a:t>
             </a:r>
           </a:p>
           <a:p>
             <a:pPr lvl="0"/>
             <a:r>
-              <a:rPr/>
               <a:t>request a pro colab account using union email</a:t>
             </a:r>
           </a:p>
           <a:p>
             <a:pPr lvl="0"/>
             <a:r>
-              <a:rPr/>
               <a:t>find e coli notebook</a:t>
             </a:r>
           </a:p>
@@ -9343,6 +9895,9 @@
       </p:sp>
     </p:spTree>
   </p:cSld>
+  <p:clrMapOvr>
+    <a:masterClrMapping/>
+  </p:clrMapOvr>
   <p:timing>
     <p:tnLst>
       <p:par>
@@ -9615,11 +10170,10 @@
           <a:bodyPr/>
           <a:lstStyle/>
           <a:p>
-            <a:pPr lvl="0" indent="0" marL="0">
+            <a:pPr marL="0" lvl="0" indent="0">
               <a:buNone/>
             </a:pPr>
             <a:r>
-              <a:rPr/>
               <a:t>Rosalind problems</a:t>
             </a:r>
           </a:p>
@@ -9642,28 +10196,24 @@
           <a:p>
             <a:pPr lvl="0"/>
             <a:r>
-              <a:rPr/>
               <a:t>genes as strings</a:t>
             </a:r>
           </a:p>
           <a:p>
             <a:pPr lvl="0"/>
             <a:r>
-              <a:rPr/>
               <a:t>accounts</a:t>
             </a:r>
           </a:p>
           <a:p>
             <a:pPr lvl="0"/>
             <a:r>
-              <a:rPr/>
               <a:t>colab notebooks</a:t>
             </a:r>
           </a:p>
           <a:p>
             <a:pPr lvl="0"/>
             <a:r>
-              <a:rPr/>
               <a:t>pair up?</a:t>
             </a:r>
           </a:p>
@@ -9671,6 +10221,9 @@
       </p:sp>
     </p:spTree>
   </p:cSld>
+  <p:clrMapOvr>
+    <a:masterClrMapping/>
+  </p:clrMapOvr>
   <p:timing>
     <p:tnLst>
       <p:par>
@@ -9943,11 +10496,10 @@
           <a:bodyPr/>
           <a:lstStyle/>
           <a:p>
-            <a:pPr lvl="0" indent="0" marL="0">
+            <a:pPr marL="0" lvl="0" indent="0">
               <a:buNone/>
             </a:pPr>
             <a:r>
-              <a:rPr/>
               <a:t>What is Biological Data?</a:t>
             </a:r>
           </a:p>
@@ -9960,7 +10512,7 @@
             <a:spLocks noGrp="1"/>
           </p:cNvSpPr>
           <p:nvPr>
-            <p:ph idx="2" sz="half" type="body"/>
+            <p:ph type="body" sz="half" idx="2"/>
           </p:nvPr>
         </p:nvSpPr>
         <p:spPr/>
@@ -9968,15 +10520,16 @@
           <a:bodyPr/>
           <a:lstStyle/>
           <a:p>
-            <a:pPr lvl="0" indent="0" marL="0">
+            <a:pPr marL="0" lvl="0" indent="0">
               <a:buNone/>
             </a:pPr>
+            <a:endParaRPr/>
           </a:p>
         </p:txBody>
       </p:sp>
       <p:pic>
         <p:nvPicPr>
-          <p:cNvPr descr="CSC483_Week3_A_files/figure-pptx/mermaid-figure-3.png" id="0" name="Picture 1"/>
+          <p:cNvPr id="3" name="Picture 1" descr="CSC483_Week3_A_files/figure-pptx/mermaid-figure-3.png"/>
           <p:cNvPicPr>
             <a:picLocks noGrp="1" noChangeAspect="1"/>
           </p:cNvPicPr>
@@ -10006,6 +10559,9 @@
       </p:pic>
     </p:spTree>
   </p:cSld>
+  <p:clrMapOvr>
+    <a:masterClrMapping/>
+  </p:clrMapOvr>
 </p:sld>
 </file>
 
@@ -10049,11 +10605,10 @@
           <a:bodyPr/>
           <a:lstStyle/>
           <a:p>
-            <a:pPr lvl="0" indent="0" marL="0">
+            <a:pPr marL="0" lvl="0" indent="0">
               <a:buNone/>
             </a:pPr>
             <a:r>
-              <a:rPr/>
               <a:t>Ecoli metadata</a:t>
             </a:r>
           </a:p>
@@ -10066,7 +10621,7 @@
             <a:spLocks noGrp="1"/>
           </p:cNvSpPr>
           <p:nvPr>
-            <p:ph idx="2" sz="half" type="body"/>
+            <p:ph type="body" sz="half" idx="2"/>
           </p:nvPr>
         </p:nvSpPr>
         <p:spPr/>
@@ -10076,33 +10631,29 @@
           <a:p>
             <a:pPr lvl="0"/>
             <a:r>
-              <a:rPr/>
               <a:t>create colab notebook</a:t>
             </a:r>
           </a:p>
           <a:p>
             <a:pPr lvl="0"/>
             <a:r>
-              <a:rPr/>
               <a:t>load E coli metadata</a:t>
             </a:r>
           </a:p>
           <a:p>
             <a:pPr lvl="0"/>
             <a:r>
-              <a:rPr/>
               <a:t>plot a data characteristic accumulation over time</a:t>
             </a:r>
           </a:p>
           <a:p>
             <a:pPr lvl="0"/>
             <a:r>
-              <a:rPr/>
               <a:t>how does it relate to ‘world in data’ graph?</a:t>
             </a:r>
           </a:p>
           <a:p>
-            <a:pPr lvl="0" indent="0" marL="0">
+            <a:pPr marL="0" lvl="0" indent="0">
               <a:spcBef>
                 <a:spcPts val="3000"/>
               </a:spcBef>
@@ -10117,7 +10668,7 @@
       </p:sp>
       <p:pic>
         <p:nvPicPr>
-          <p:cNvPr descr="cdc_abxR_threats.png" id="0" name="Picture 1"/>
+          <p:cNvPr id="3" name="Picture 1" descr="cdc_abxR_threats.png"/>
           <p:cNvPicPr>
             <a:picLocks noGrp="1" noChangeAspect="1"/>
           </p:cNvPicPr>
@@ -10147,6 +10698,9 @@
       </p:pic>
     </p:spTree>
   </p:cSld>
+  <p:clrMapOvr>
+    <a:masterClrMapping/>
+  </p:clrMapOvr>
   <p:timing>
     <p:tnLst>
       <p:par>
@@ -10408,26 +10962,25 @@
         </p:nvSpPr>
         <p:spPr/>
         <p:txBody>
-          <a:bodyPr/>
+          <a:bodyPr>
+            <a:normAutofit fontScale="25000" lnSpcReduction="20000"/>
+          </a:bodyPr>
           <a:lstStyle/>
           <a:p>
             <a:pPr lvl="0"/>
             <a:r>
-              <a:rPr/>
               <a:t>strains, genes</a:t>
             </a:r>
           </a:p>
           <a:p>
             <a:pPr lvl="0"/>
             <a:r>
-              <a:rPr/>
               <a:t>pathogenicity</a:t>
             </a:r>
           </a:p>
           <a:p>
             <a:pPr lvl="0"/>
             <a:r>
-              <a:rPr/>
               <a:t>CDC </a:t>
             </a:r>
             <a:r>
@@ -10440,12 +10993,11 @@
           <a:p>
             <a:pPr lvl="1"/>
             <a:r>
-              <a:rPr/>
               <a:t>click to “types”</a:t>
             </a:r>
           </a:p>
           <a:p>
-            <a:pPr lvl="0" indent="0" marL="0">
+            <a:pPr marL="0" lvl="0" indent="0">
               <a:spcBef>
                 <a:spcPts val="3000"/>
               </a:spcBef>
@@ -10459,33 +11011,29 @@
           <a:p>
             <a:pPr lvl="0"/>
             <a:r>
-              <a:rPr/>
               <a:t>explore metadata</a:t>
             </a:r>
           </a:p>
           <a:p>
             <a:pPr lvl="0"/>
             <a:r>
-              <a:rPr/>
               <a:t>table</a:t>
             </a:r>
           </a:p>
           <a:p>
             <a:pPr lvl="0"/>
             <a:r>
-              <a:rPr/>
               <a:t>plot</a:t>
             </a:r>
           </a:p>
           <a:p>
             <a:pPr lvl="0"/>
             <a:r>
-              <a:rPr/>
               <a:t>revisit: what questions can be asked/answered?</a:t>
             </a:r>
           </a:p>
           <a:p>
-            <a:pPr lvl="0" indent="0" marL="0">
+            <a:pPr marL="0" lvl="0" indent="0">
               <a:spcBef>
                 <a:spcPts val="3000"/>
               </a:spcBef>
@@ -10497,48 +11045,43 @@
             </a:r>
           </a:p>
           <a:p>
-            <a:pPr lvl="0" indent="-342900" marL="342900">
+            <a:pPr marL="342900" lvl="0" indent="-342900">
               <a:buAutoNum type="arabicPeriod"/>
             </a:pPr>
             <a:r>
-              <a:rPr/>
               <a:t>Also in Colab, finish working with the metadata introduced in class.</a:t>
             </a:r>
           </a:p>
           <a:p>
-            <a:pPr lvl="0" indent="-342900" marL="342900">
+            <a:pPr marL="342900" lvl="0" indent="-342900">
               <a:buAutoNum type="arabicPeriod"/>
             </a:pPr>
             <a:r>
-              <a:rPr/>
               <a:t>Make at least 3 plots analyzing or summarizing columns.</a:t>
             </a:r>
           </a:p>
           <a:p>
-            <a:pPr lvl="0" indent="-342900" marL="342900">
+            <a:pPr marL="342900" lvl="0" indent="-342900">
               <a:buAutoNum type="arabicPeriod"/>
             </a:pPr>
             <a:r>
-              <a:rPr/>
               <a:t>Write down (in Markdown) a comparison you think would be interesting to make, why you think it would be interesting and what you hypothesize the result would look like.</a:t>
             </a:r>
           </a:p>
           <a:p>
             <a:pPr lvl="1"/>
             <a:r>
-              <a:rPr/>
               <a:t>you don’t have to succeed in your comparison yet, if you’d need more tools/libraries/functions to do so</a:t>
             </a:r>
           </a:p>
           <a:p>
             <a:pPr lvl="1"/>
             <a:r>
-              <a:rPr/>
               <a:t>it is more important that you have a reason for making the comparion and an estimate to which you could compare your results</a:t>
             </a:r>
           </a:p>
           <a:p>
-            <a:pPr lvl="0" indent="0" marL="0">
+            <a:pPr marL="0" lvl="0" indent="0">
               <a:spcBef>
                 <a:spcPts val="3000"/>
               </a:spcBef>
@@ -10552,28 +11095,24 @@
           <a:p>
             <a:pPr lvl="0"/>
             <a:r>
-              <a:rPr/>
               <a:t>more python review</a:t>
             </a:r>
           </a:p>
           <a:p>
             <a:pPr lvl="0"/>
             <a:r>
-              <a:rPr/>
               <a:t>examples of sequences processing/alignment</a:t>
             </a:r>
           </a:p>
           <a:p>
             <a:pPr lvl="0"/>
             <a:r>
-              <a:rPr/>
               <a:t>at scale, libraries/packages/programs used for these steps</a:t>
             </a:r>
           </a:p>
           <a:p>
             <a:pPr lvl="0"/>
             <a:r>
-              <a:rPr/>
               <a:t>colab notebook review: practice sharing, commenting, discussing, updating</a:t>
             </a:r>
           </a:p>
@@ -10581,6 +11120,9 @@
       </p:sp>
     </p:spTree>
   </p:cSld>
+  <p:clrMapOvr>
+    <a:masterClrMapping/>
+  </p:clrMapOvr>
   <p:timing>
     <p:tnLst>
       <p:par>
@@ -11490,11 +12032,10 @@
           <a:bodyPr/>
           <a:lstStyle/>
           <a:p>
-            <a:pPr lvl="0" indent="0" marL="0">
+            <a:pPr marL="0" lvl="0" indent="0">
               <a:buNone/>
             </a:pPr>
             <a:r>
-              <a:rPr/>
               <a:t>Rooted in Chemistry</a:t>
             </a:r>
           </a:p>
@@ -11502,7 +12043,7 @@
       </p:sp>
       <p:pic>
         <p:nvPicPr>
-          <p:cNvPr descr="nucleotides.png" id="0" name="Picture 1"/>
+          <p:cNvPr id="3" name="Picture 1" descr="nucleotides.png"/>
           <p:cNvPicPr>
             <a:picLocks noGrp="1" noChangeAspect="1"/>
           </p:cNvPicPr>
@@ -11532,6 +12073,9 @@
       </p:pic>
     </p:spTree>
   </p:cSld>
+  <p:clrMapOvr>
+    <a:masterClrMapping/>
+  </p:clrMapOvr>
 </p:sld>
 </file>
 
@@ -11575,11 +12119,10 @@
           <a:bodyPr/>
           <a:lstStyle/>
           <a:p>
-            <a:pPr lvl="0" indent="0" marL="0">
+            <a:pPr marL="0" lvl="0" indent="0">
               <a:buNone/>
             </a:pPr>
             <a:r>
-              <a:rPr/>
               <a:t>Ends up being about information</a:t>
             </a:r>
           </a:p>
@@ -11587,7 +12130,7 @@
       </p:sp>
       <p:pic>
         <p:nvPicPr>
-          <p:cNvPr descr="Genetic-code.jpg" id="0" name="Picture 1"/>
+          <p:cNvPr id="3" name="Picture 1" descr="Genetic-code.jpg"/>
           <p:cNvPicPr>
             <a:picLocks noGrp="1" noChangeAspect="1"/>
           </p:cNvPicPr>
@@ -11617,6 +12160,9 @@
       </p:pic>
     </p:spTree>
   </p:cSld>
+  <p:clrMapOvr>
+    <a:masterClrMapping/>
+  </p:clrMapOvr>
 </p:sld>
 </file>
 
@@ -11660,11 +12206,10 @@
           <a:bodyPr/>
           <a:lstStyle/>
           <a:p>
-            <a:pPr lvl="0" indent="0" marL="0">
+            <a:pPr marL="0" lvl="0" indent="0">
               <a:buNone/>
             </a:pPr>
             <a:r>
-              <a:rPr/>
               <a:t>What is a ‘gene’</a:t>
             </a:r>
           </a:p>
@@ -11672,7 +12217,7 @@
       </p:sp>
       <p:pic>
         <p:nvPicPr>
-          <p:cNvPr descr="central_dogma.png" id="0" name="Picture 1"/>
+          <p:cNvPr id="3" name="Picture 1" descr="central_dogma.png"/>
           <p:cNvPicPr>
             <a:picLocks noGrp="1" noChangeAspect="1"/>
           </p:cNvPicPr>
@@ -11702,6 +12247,9 @@
       </p:pic>
     </p:spTree>
   </p:cSld>
+  <p:clrMapOvr>
+    <a:masterClrMapping/>
+  </p:clrMapOvr>
 </p:sld>
 </file>
 
@@ -11745,11 +12293,10 @@
           <a:bodyPr/>
           <a:lstStyle/>
           <a:p>
-            <a:pPr lvl="0" indent="0" marL="0">
+            <a:pPr marL="0" lvl="0" indent="0">
               <a:buNone/>
             </a:pPr>
             <a:r>
-              <a:rPr/>
               <a:t>Biological Data Accumulation</a:t>
             </a:r>
           </a:p>
@@ -11757,7 +12304,7 @@
       </p:sp>
       <p:pic>
         <p:nvPicPr>
-          <p:cNvPr descr="number-of-entries-in-biological-sequence-databases.png" id="0" name="Picture 1"/>
+          <p:cNvPr id="4" name="Picture 1" descr="number-of-entries-in-biological-sequence-databases.png"/>
           <p:cNvPicPr>
             <a:picLocks noGrp="1" noChangeAspect="1"/>
           </p:cNvPicPr>
@@ -11787,7 +12334,7 @@
       </p:pic>
       <p:sp>
         <p:nvSpPr>
-          <p:cNvPr id="1" name="TextBox 3"/>
+          <p:cNvPr id="5" name="TextBox 3"/>
           <p:cNvSpPr txBox="1"/>
           <p:nvPr/>
         </p:nvSpPr>
@@ -11805,11 +12352,10 @@
           <a:bodyPr/>
           <a:lstStyle/>
           <a:p>
-            <a:pPr lvl="0" indent="0" marL="0" algn="ctr">
+            <a:pPr marL="0" lvl="0" indent="0" algn="ctr">
               <a:buNone/>
             </a:pPr>
             <a:r>
-              <a:rPr/>
               <a:t>Biological Data</a:t>
             </a:r>
           </a:p>
@@ -11830,7 +12376,7 @@
           <a:bodyPr/>
           <a:lstStyle/>
           <a:p>
-            <a:pPr lvl="0" indent="0" marL="0">
+            <a:pPr marL="0" lvl="0" indent="0">
               <a:buNone/>
             </a:pPr>
             <a:r>
@@ -11844,6 +12390,9 @@
       </p:sp>
     </p:spTree>
   </p:cSld>
+  <p:clrMapOvr>
+    <a:masterClrMapping/>
+  </p:clrMapOvr>
 </p:sld>
 </file>
 
@@ -11887,11 +12436,10 @@
           <a:bodyPr/>
           <a:lstStyle/>
           <a:p>
-            <a:pPr lvl="0" indent="0" marL="0">
+            <a:pPr marL="0" lvl="0" indent="0">
               <a:buNone/>
             </a:pPr>
             <a:r>
-              <a:rPr/>
               <a:t>Ethics of Data</a:t>
             </a:r>
           </a:p>
@@ -11909,54 +12457,49 @@
         </p:nvSpPr>
         <p:spPr/>
         <p:txBody>
-          <a:bodyPr/>
+          <a:bodyPr>
+            <a:normAutofit fontScale="92500" lnSpcReduction="10000"/>
+          </a:bodyPr>
           <a:lstStyle/>
           <a:p>
             <a:pPr lvl="0"/>
             <a:r>
-              <a:rPr/>
               <a:t>measured vs predicted data?</a:t>
             </a:r>
           </a:p>
           <a:p>
             <a:pPr lvl="0"/>
             <a:r>
-              <a:rPr/>
               <a:t>references?</a:t>
             </a:r>
           </a:p>
           <a:p>
             <a:pPr lvl="0"/>
             <a:r>
-              <a:rPr/>
               <a:t>funding sources?</a:t>
             </a:r>
           </a:p>
           <a:p>
             <a:pPr lvl="0"/>
             <a:r>
-              <a:rPr/>
               <a:t>reproducibility?</a:t>
             </a:r>
           </a:p>
           <a:p>
             <a:pPr lvl="0"/>
             <a:r>
-              <a:rPr/>
               <a:t>data types?</a:t>
             </a:r>
           </a:p>
           <a:p>
             <a:pPr lvl="0"/>
             <a:r>
-              <a:rPr/>
               <a:t>cross population?</a:t>
             </a:r>
           </a:p>
           <a:p>
             <a:pPr lvl="0"/>
             <a:r>
-              <a:rPr/>
               <a:t>intention of the data post? intention of the original data source?</a:t>
             </a:r>
           </a:p>
@@ -11964,6 +12507,9 @@
       </p:sp>
     </p:spTree>
   </p:cSld>
+  <p:clrMapOvr>
+    <a:masterClrMapping/>
+  </p:clrMapOvr>
   <p:timing>
     <p:tnLst>
       <p:par>
@@ -12383,11 +12929,10 @@
           <a:bodyPr/>
           <a:lstStyle/>
           <a:p>
-            <a:pPr lvl="0" indent="0" marL="0">
+            <a:pPr marL="0" lvl="0" indent="0">
               <a:buNone/>
             </a:pPr>
             <a:r>
-              <a:rPr/>
               <a:t>Purpose of Collecting Biological Data</a:t>
             </a:r>
           </a:p>
@@ -12410,7 +12955,6 @@
           <a:p>
             <a:pPr lvl="0"/>
             <a:r>
-              <a:rPr/>
               <a:t>for human data, studying health and disease, e.g. 1000s Genomes Project: </a:t>
             </a:r>
             <a:r>
@@ -12423,33 +12967,34 @@
           <a:p>
             <a:pPr lvl="1"/>
             <a:r>
-              <a:rPr/>
               <a:t>detect disease-associated alleles</a:t>
             </a:r>
           </a:p>
           <a:p>
             <a:pPr lvl="1"/>
             <a:r>
-              <a:rPr/>
               <a:t>check specific loci, spots</a:t>
             </a:r>
           </a:p>
           <a:p>
             <a:pPr lvl="1"/>
             <a:r>
-              <a:rPr/>
               <a:t>RNAseq - does it cause disease</a:t>
             </a:r>
           </a:p>
           <a:p>
-            <a:pPr lvl="1" indent="0" marL="342900">
+            <a:pPr marL="342900" lvl="1" indent="0">
               <a:buNone/>
             </a:pPr>
+            <a:endParaRPr/>
           </a:p>
         </p:txBody>
       </p:sp>
     </p:spTree>
   </p:cSld>
+  <p:clrMapOvr>
+    <a:masterClrMapping/>
+  </p:clrMapOvr>
   <p:timing>
     <p:tnLst>
       <p:par>
@@ -13054,265 +13599,4 @@
     </a:ext>
   </a:extLst>
 </a:theme>
-</file>
-
-<file path=ppt/theme/theme2.xml><?xml version="1.0" encoding="utf-8"?>
-<a:theme xmlns:a="http://schemas.openxmlformats.org/drawingml/2006/main" name="Office Theme">
-  <a:themeElements>
-    <a:clrScheme name="Office">
-      <a:dk1>
-        <a:sysClr val="windowText" lastClr="000000"/>
-      </a:dk1>
-      <a:lt1>
-        <a:sysClr val="window" lastClr="FFFFFF"/>
-      </a:lt1>
-      <a:dk2>
-        <a:srgbClr val="44546A"/>
-      </a:dk2>
-      <a:lt2>
-        <a:srgbClr val="E7E6E6"/>
-      </a:lt2>
-      <a:accent1>
-        <a:srgbClr val="5B9BD5"/>
-      </a:accent1>
-      <a:accent2>
-        <a:srgbClr val="ED7D31"/>
-      </a:accent2>
-      <a:accent3>
-        <a:srgbClr val="A5A5A5"/>
-      </a:accent3>
-      <a:accent4>
-        <a:srgbClr val="FFC000"/>
-      </a:accent4>
-      <a:accent5>
-        <a:srgbClr val="4472C4"/>
-      </a:accent5>
-      <a:accent6>
-        <a:srgbClr val="70AD47"/>
-      </a:accent6>
-      <a:hlink>
-        <a:srgbClr val="0563C1"/>
-      </a:hlink>
-      <a:folHlink>
-        <a:srgbClr val="954F72"/>
-      </a:folHlink>
-    </a:clrScheme>
-    <a:fontScheme name="Office">
-      <a:majorFont>
-        <a:latin typeface="Calibri Light" panose="020F0302020204030204"/>
-        <a:ea typeface=""/>
-        <a:cs typeface=""/>
-        <a:font script="Jpan" typeface="ＭＳ Ｐゴシック"/>
-        <a:font script="Hang" typeface="맑은 고딕"/>
-        <a:font script="Hans" typeface="宋体"/>
-        <a:font script="Hant" typeface="新細明體"/>
-        <a:font script="Arab" typeface="Times New Roman"/>
-        <a:font script="Hebr" typeface="Times New Roman"/>
-        <a:font script="Thai" typeface="Angsana New"/>
-        <a:font script="Ethi" typeface="Nyala"/>
-        <a:font script="Beng" typeface="Vrinda"/>
-        <a:font script="Gujr" typeface="Shruti"/>
-        <a:font script="Khmr" typeface="MoolBoran"/>
-        <a:font script="Knda" typeface="Tunga"/>
-        <a:font script="Guru" typeface="Raavi"/>
-        <a:font script="Cans" typeface="Euphemia"/>
-        <a:font script="Cher" typeface="Plantagenet Cherokee"/>
-        <a:font script="Yiii" typeface="Microsoft Yi Baiti"/>
-        <a:font script="Tibt" typeface="Microsoft Himalaya"/>
-        <a:font script="Thaa" typeface="MV Boli"/>
-        <a:font script="Deva" typeface="Mangal"/>
-        <a:font script="Telu" typeface="Gautami"/>
-        <a:font script="Taml" typeface="Latha"/>
-        <a:font script="Syrc" typeface="Estrangelo Edessa"/>
-        <a:font script="Orya" typeface="Kalinga"/>
-        <a:font script="Mlym" typeface="Kartika"/>
-        <a:font script="Laoo" typeface="DokChampa"/>
-        <a:font script="Sinh" typeface="Iskoola Pota"/>
-        <a:font script="Mong" typeface="Mongolian Baiti"/>
-        <a:font script="Viet" typeface="Times New Roman"/>
-        <a:font script="Uigh" typeface="Microsoft Uighur"/>
-        <a:font script="Geor" typeface="Sylfaen"/>
-      </a:majorFont>
-      <a:minorFont>
-        <a:latin typeface="Calibri" panose="020F0502020204030204"/>
-        <a:ea typeface=""/>
-        <a:cs typeface=""/>
-        <a:font script="Jpan" typeface="ＭＳ Ｐゴシック"/>
-        <a:font script="Hang" typeface="맑은 고딕"/>
-        <a:font script="Hans" typeface="宋体"/>
-        <a:font script="Hant" typeface="新細明體"/>
-        <a:font script="Arab" typeface="Arial"/>
-        <a:font script="Hebr" typeface="Arial"/>
-        <a:font script="Thai" typeface="Cordia New"/>
-        <a:font script="Ethi" typeface="Nyala"/>
-        <a:font script="Beng" typeface="Vrinda"/>
-        <a:font script="Gujr" typeface="Shruti"/>
-        <a:font script="Khmr" typeface="DaunPenh"/>
-        <a:font script="Knda" typeface="Tunga"/>
-        <a:font script="Guru" typeface="Raavi"/>
-        <a:font script="Cans" typeface="Euphemia"/>
-        <a:font script="Cher" typeface="Plantagenet Cherokee"/>
-        <a:font script="Yiii" typeface="Microsoft Yi Baiti"/>
-        <a:font script="Tibt" typeface="Microsoft Himalaya"/>
-        <a:font script="Thaa" typeface="MV Boli"/>
-        <a:font script="Deva" typeface="Mangal"/>
-        <a:font script="Telu" typeface="Gautami"/>
-        <a:font script="Taml" typeface="Latha"/>
-        <a:font script="Syrc" typeface="Estrangelo Edessa"/>
-        <a:font script="Orya" typeface="Kalinga"/>
-        <a:font script="Mlym" typeface="Kartika"/>
-        <a:font script="Laoo" typeface="DokChampa"/>
-        <a:font script="Sinh" typeface="Iskoola Pota"/>
-        <a:font script="Mong" typeface="Mongolian Baiti"/>
-        <a:font script="Viet" typeface="Arial"/>
-        <a:font script="Uigh" typeface="Microsoft Uighur"/>
-        <a:font script="Geor" typeface="Sylfaen"/>
-      </a:minorFont>
-    </a:fontScheme>
-    <a:fmtScheme name="Office">
-      <a:fillStyleLst>
-        <a:solidFill>
-          <a:schemeClr val="phClr"/>
-        </a:solidFill>
-        <a:gradFill rotWithShape="1">
-          <a:gsLst>
-            <a:gs pos="0">
-              <a:schemeClr val="phClr">
-                <a:lumMod val="110000"/>
-                <a:satMod val="105000"/>
-                <a:tint val="67000"/>
-              </a:schemeClr>
-            </a:gs>
-            <a:gs pos="50000">
-              <a:schemeClr val="phClr">
-                <a:lumMod val="105000"/>
-                <a:satMod val="103000"/>
-                <a:tint val="73000"/>
-              </a:schemeClr>
-            </a:gs>
-            <a:gs pos="100000">
-              <a:schemeClr val="phClr">
-                <a:lumMod val="105000"/>
-                <a:satMod val="109000"/>
-                <a:tint val="81000"/>
-              </a:schemeClr>
-            </a:gs>
-          </a:gsLst>
-          <a:lin ang="5400000" scaled="0"/>
-        </a:gradFill>
-        <a:gradFill rotWithShape="1">
-          <a:gsLst>
-            <a:gs pos="0">
-              <a:schemeClr val="phClr">
-                <a:satMod val="103000"/>
-                <a:lumMod val="102000"/>
-                <a:tint val="94000"/>
-              </a:schemeClr>
-            </a:gs>
-            <a:gs pos="50000">
-              <a:schemeClr val="phClr">
-                <a:satMod val="110000"/>
-                <a:lumMod val="100000"/>
-                <a:shade val="100000"/>
-              </a:schemeClr>
-            </a:gs>
-            <a:gs pos="100000">
-              <a:schemeClr val="phClr">
-                <a:lumMod val="99000"/>
-                <a:satMod val="120000"/>
-                <a:shade val="78000"/>
-              </a:schemeClr>
-            </a:gs>
-          </a:gsLst>
-          <a:lin ang="5400000" scaled="0"/>
-        </a:gradFill>
-      </a:fillStyleLst>
-      <a:lnStyleLst>
-        <a:ln w="6350" cap="flat" cmpd="sng" algn="ctr">
-          <a:solidFill>
-            <a:schemeClr val="phClr"/>
-          </a:solidFill>
-          <a:prstDash val="solid"/>
-          <a:miter lim="800000"/>
-        </a:ln>
-        <a:ln w="12700" cap="flat" cmpd="sng" algn="ctr">
-          <a:solidFill>
-            <a:schemeClr val="phClr"/>
-          </a:solidFill>
-          <a:prstDash val="solid"/>
-          <a:miter lim="800000"/>
-        </a:ln>
-        <a:ln w="19050" cap="flat" cmpd="sng" algn="ctr">
-          <a:solidFill>
-            <a:schemeClr val="phClr"/>
-          </a:solidFill>
-          <a:prstDash val="solid"/>
-          <a:miter lim="800000"/>
-        </a:ln>
-      </a:lnStyleLst>
-      <a:effectStyleLst>
-        <a:effectStyle>
-          <a:effectLst/>
-        </a:effectStyle>
-        <a:effectStyle>
-          <a:effectLst/>
-        </a:effectStyle>
-        <a:effectStyle>
-          <a:effectLst>
-            <a:outerShdw blurRad="57150" dist="19050" dir="5400000" algn="ctr" rotWithShape="0">
-              <a:srgbClr val="000000">
-                <a:alpha val="63000"/>
-              </a:srgbClr>
-            </a:outerShdw>
-          </a:effectLst>
-        </a:effectStyle>
-      </a:effectStyleLst>
-      <a:bgFillStyleLst>
-        <a:solidFill>
-          <a:schemeClr val="phClr"/>
-        </a:solidFill>
-        <a:solidFill>
-          <a:schemeClr val="phClr">
-            <a:tint val="95000"/>
-            <a:satMod val="170000"/>
-          </a:schemeClr>
-        </a:solidFill>
-        <a:gradFill rotWithShape="1">
-          <a:gsLst>
-            <a:gs pos="0">
-              <a:schemeClr val="phClr">
-                <a:tint val="93000"/>
-                <a:satMod val="150000"/>
-                <a:shade val="98000"/>
-                <a:lumMod val="102000"/>
-              </a:schemeClr>
-            </a:gs>
-            <a:gs pos="50000">
-              <a:schemeClr val="phClr">
-                <a:tint val="98000"/>
-                <a:satMod val="130000"/>
-                <a:shade val="90000"/>
-                <a:lumMod val="103000"/>
-              </a:schemeClr>
-            </a:gs>
-            <a:gs pos="100000">
-              <a:schemeClr val="phClr">
-                <a:shade val="63000"/>
-                <a:satMod val="120000"/>
-              </a:schemeClr>
-            </a:gs>
-          </a:gsLst>
-          <a:lin ang="5400000" scaled="0"/>
-        </a:gradFill>
-      </a:bgFillStyleLst>
-    </a:fmtScheme>
-  </a:themeElements>
-  <a:objectDefaults/>
-  <a:extraClrSchemeLst/>
-  <a:extLst>
-    <a:ext uri="{05A4C25C-085E-4340-85A3-A5531E510DB2}">
-      <thm15:themeFamily xmlns:thm15="http://schemas.microsoft.com/office/thememl/2012/main" name="Office Theme" id="{62F939B6-93AF-4DB8-9C6B-D6C7DFDC589F}" vid="{4A3C46E8-61CC-4603-A589-7422A47A8E4A}"/>
-    </a:ext>
-  </a:extLst>
-</a:theme>
 </file>